--- a/21_c_study/example/ring_buf/ring_buffer_AI_enqueue.pptx
+++ b/21_c_study/example/ring_buf/ring_buffer_AI_enqueue.pptx
@@ -232,7 +232,7 @@
           <a:p>
             <a:fld id="{81406EB0-B97D-49F4-8313-D3926DE8860A}" type="datetimeFigureOut">
               <a:rPr lang="ko-KR" altLang="en-US" smtClean="0"/>
-              <a:t>2026-04-06</a:t>
+              <a:t>2026-04-07</a:t>
             </a:fld>
             <a:endParaRPr lang="ko-KR" altLang="en-US"/>
           </a:p>
@@ -397,7 +397,7 @@
           <a:p>
             <a:fld id="{14D34DEB-12D1-4386-BA98-56BFB740DC56}" type="datetimeFigureOut">
               <a:rPr lang="ko-KR" altLang="en-US" smtClean="0"/>
-              <a:t>2026-04-06</a:t>
+              <a:t>2026-04-07</a:t>
             </a:fld>
             <a:endParaRPr lang="ko-KR" altLang="en-US" dirty="0"/>
           </a:p>
@@ -4281,211 +4281,6 @@
           </a:p>
         </p:txBody>
       </p:sp>
-      <p:sp>
-        <p:nvSpPr>
-          <p:cNvPr id="17" name="TextBox 16">
-            <a:extLst>
-              <a:ext uri="{FF2B5EF4-FFF2-40B4-BE49-F238E27FC236}">
-                <a16:creationId xmlns:a16="http://schemas.microsoft.com/office/drawing/2014/main" id="{D28752F8-340B-6C24-65B8-A79A96EBBF12}"/>
-              </a:ext>
-            </a:extLst>
-          </p:cNvPr>
-          <p:cNvSpPr txBox="1"/>
-          <p:nvPr/>
-        </p:nvSpPr>
-        <p:spPr>
-          <a:xfrm>
-            <a:off x="6522172" y="439189"/>
-            <a:ext cx="3097643" cy="604717"/>
-          </a:xfrm>
-          <a:prstGeom prst="rect">
-            <a:avLst/>
-          </a:prstGeom>
-          <a:noFill/>
-        </p:spPr>
-        <p:txBody>
-          <a:bodyPr wrap="none" lIns="0" tIns="0" rIns="0" bIns="0" rtlCol="0">
-            <a:spAutoFit/>
-          </a:bodyPr>
-          <a:lstStyle/>
-          <a:p>
-            <a:pPr>
-              <a:lnSpc>
-                <a:spcPct val="150000"/>
-              </a:lnSpc>
-            </a:pPr>
-            <a:r>
-              <a:rPr lang="en-US" altLang="ko-KR" sz="1400" dirty="0">
-                <a:ln>
-                  <a:solidFill>
-                    <a:schemeClr val="tx1">
-                      <a:alpha val="0"/>
-                    </a:schemeClr>
-                  </a:solidFill>
-                </a:ln>
-                <a:latin typeface="맑은 고딕" panose="020B0503020000020004" pitchFamily="50" charset="-127"/>
-                <a:ea typeface="맑은 고딕" panose="020B0503020000020004" pitchFamily="50" charset="-127"/>
-                <a:cs typeface="Pretendard SemiBold" pitchFamily="50" charset="-127"/>
-              </a:rPr>
-              <a:t>- Data 2</a:t>
-            </a:r>
-            <a:r>
-              <a:rPr lang="ko-KR" altLang="en-US" sz="1400" dirty="0">
-                <a:ln>
-                  <a:solidFill>
-                    <a:schemeClr val="tx1">
-                      <a:alpha val="0"/>
-                    </a:schemeClr>
-                  </a:solidFill>
-                </a:ln>
-                <a:latin typeface="맑은 고딕" panose="020B0503020000020004" pitchFamily="50" charset="-127"/>
-                <a:ea typeface="맑은 고딕" panose="020B0503020000020004" pitchFamily="50" charset="-127"/>
-                <a:cs typeface="Pretendard SemiBold" pitchFamily="50" charset="-127"/>
-              </a:rPr>
-              <a:t>개 입력 됨</a:t>
-            </a:r>
-            <a:endParaRPr lang="en-US" altLang="ko-KR" sz="1400" dirty="0">
-              <a:ln>
-                <a:solidFill>
-                  <a:schemeClr val="tx1">
-                    <a:alpha val="0"/>
-                  </a:schemeClr>
-                </a:solidFill>
-              </a:ln>
-              <a:latin typeface="맑은 고딕" panose="020B0503020000020004" pitchFamily="50" charset="-127"/>
-              <a:ea typeface="맑은 고딕" panose="020B0503020000020004" pitchFamily="50" charset="-127"/>
-              <a:cs typeface="Pretendard SemiBold" pitchFamily="50" charset="-127"/>
-            </a:endParaRPr>
-          </a:p>
-          <a:p>
-            <a:pPr>
-              <a:lnSpc>
-                <a:spcPct val="150000"/>
-              </a:lnSpc>
-            </a:pPr>
-            <a:r>
-              <a:rPr lang="en-US" altLang="ko-KR" sz="1400" dirty="0">
-                <a:ln>
-                  <a:solidFill>
-                    <a:schemeClr val="tx1">
-                      <a:alpha val="0"/>
-                    </a:schemeClr>
-                  </a:solidFill>
-                </a:ln>
-                <a:latin typeface="맑은 고딕" panose="020B0503020000020004" pitchFamily="50" charset="-127"/>
-                <a:ea typeface="맑은 고딕" panose="020B0503020000020004" pitchFamily="50" charset="-127"/>
-                <a:cs typeface="Pretendard SemiBold" pitchFamily="50" charset="-127"/>
-              </a:rPr>
-              <a:t>-[0]~[1]</a:t>
-            </a:r>
-            <a:r>
-              <a:rPr lang="ko-KR" altLang="en-US" sz="1400" dirty="0">
-                <a:ln>
-                  <a:solidFill>
-                    <a:schemeClr val="tx1">
-                      <a:alpha val="0"/>
-                    </a:schemeClr>
-                  </a:solidFill>
-                </a:ln>
-                <a:latin typeface="맑은 고딕" panose="020B0503020000020004" pitchFamily="50" charset="-127"/>
-                <a:ea typeface="맑은 고딕" panose="020B0503020000020004" pitchFamily="50" charset="-127"/>
-                <a:cs typeface="Pretendard SemiBold" pitchFamily="50" charset="-127"/>
-              </a:rPr>
-              <a:t>에</a:t>
-            </a:r>
-            <a:r>
-              <a:rPr lang="en-US" altLang="ko-KR" sz="1400" dirty="0">
-                <a:ln>
-                  <a:solidFill>
-                    <a:schemeClr val="tx1">
-                      <a:alpha val="0"/>
-                    </a:schemeClr>
-                  </a:solidFill>
-                </a:ln>
-                <a:latin typeface="맑은 고딕" panose="020B0503020000020004" pitchFamily="50" charset="-127"/>
-                <a:ea typeface="맑은 고딕" panose="020B0503020000020004" pitchFamily="50" charset="-127"/>
-                <a:cs typeface="Pretendard SemiBold" pitchFamily="50" charset="-127"/>
-              </a:rPr>
-              <a:t> enqueue </a:t>
-            </a:r>
-            <a:r>
-              <a:rPr lang="ko-KR" altLang="en-US" sz="1400" dirty="0">
-                <a:ln>
-                  <a:solidFill>
-                    <a:schemeClr val="tx1">
-                      <a:alpha val="0"/>
-                    </a:schemeClr>
-                  </a:solidFill>
-                </a:ln>
-                <a:latin typeface="맑은 고딕" panose="020B0503020000020004" pitchFamily="50" charset="-127"/>
-                <a:ea typeface="맑은 고딕" panose="020B0503020000020004" pitchFamily="50" charset="-127"/>
-                <a:cs typeface="Pretendard SemiBold" pitchFamily="50" charset="-127"/>
-              </a:rPr>
-              <a:t>후</a:t>
-            </a:r>
-            <a:r>
-              <a:rPr lang="en-US" altLang="ko-KR" sz="1400" dirty="0">
-                <a:ln>
-                  <a:solidFill>
-                    <a:schemeClr val="tx1">
-                      <a:alpha val="0"/>
-                    </a:schemeClr>
-                  </a:solidFill>
-                </a:ln>
-                <a:latin typeface="맑은 고딕" panose="020B0503020000020004" pitchFamily="50" charset="-127"/>
-                <a:ea typeface="맑은 고딕" panose="020B0503020000020004" pitchFamily="50" charset="-127"/>
-                <a:cs typeface="Pretendard SemiBold" pitchFamily="50" charset="-127"/>
-              </a:rPr>
-              <a:t>, [2]</a:t>
-            </a:r>
-            <a:r>
-              <a:rPr lang="ko-KR" altLang="en-US" sz="1400" dirty="0">
-                <a:ln>
-                  <a:solidFill>
-                    <a:schemeClr val="tx1">
-                      <a:alpha val="0"/>
-                    </a:schemeClr>
-                  </a:solidFill>
-                </a:ln>
-                <a:latin typeface="맑은 고딕" panose="020B0503020000020004" pitchFamily="50" charset="-127"/>
-                <a:ea typeface="맑은 고딕" panose="020B0503020000020004" pitchFamily="50" charset="-127"/>
-                <a:cs typeface="Pretendard SemiBold" pitchFamily="50" charset="-127"/>
-              </a:rPr>
-              <a:t>에 </a:t>
-            </a:r>
-            <a:r>
-              <a:rPr lang="en-US" altLang="ko-KR" sz="1400" dirty="0">
-                <a:ln>
-                  <a:solidFill>
-                    <a:schemeClr val="tx1">
-                      <a:alpha val="0"/>
-                    </a:schemeClr>
-                  </a:solidFill>
-                </a:ln>
-                <a:latin typeface="맑은 고딕" panose="020B0503020000020004" pitchFamily="50" charset="-127"/>
-                <a:ea typeface="맑은 고딕" panose="020B0503020000020004" pitchFamily="50" charset="-127"/>
-                <a:cs typeface="Pretendard SemiBold" pitchFamily="50" charset="-127"/>
-              </a:rPr>
-              <a:t>rear </a:t>
-            </a:r>
-            <a:r>
-              <a:rPr lang="ko-KR" altLang="en-US" sz="1400" dirty="0">
-                <a:ln>
-                  <a:solidFill>
-                    <a:schemeClr val="tx1">
-                      <a:alpha val="0"/>
-                    </a:schemeClr>
-                  </a:solidFill>
-                </a:ln>
-                <a:latin typeface="맑은 고딕" panose="020B0503020000020004" pitchFamily="50" charset="-127"/>
-                <a:ea typeface="맑은 고딕" panose="020B0503020000020004" pitchFamily="50" charset="-127"/>
-                <a:cs typeface="Pretendard SemiBold" pitchFamily="50" charset="-127"/>
-              </a:rPr>
-              <a:t>위치</a:t>
-            </a:r>
-          </a:p>
-        </p:txBody>
-      </p:sp>
       <p:graphicFrame>
         <p:nvGraphicFramePr>
           <p:cNvPr id="20" name="표 19">
@@ -6394,268 +6189,6 @@
           </p:txBody>
         </p:sp>
       </p:grpSp>
-      <p:sp>
-        <p:nvSpPr>
-          <p:cNvPr id="12" name="TextBox 11">
-            <a:extLst>
-              <a:ext uri="{FF2B5EF4-FFF2-40B4-BE49-F238E27FC236}">
-                <a16:creationId xmlns:a16="http://schemas.microsoft.com/office/drawing/2014/main" id="{CD890A06-9616-B5C7-5245-CBC058C8E55F}"/>
-              </a:ext>
-            </a:extLst>
-          </p:cNvPr>
-          <p:cNvSpPr txBox="1"/>
-          <p:nvPr/>
-        </p:nvSpPr>
-        <p:spPr>
-          <a:xfrm>
-            <a:off x="5080677" y="1824501"/>
-            <a:ext cx="3337364" cy="604717"/>
-          </a:xfrm>
-          <a:prstGeom prst="rect">
-            <a:avLst/>
-          </a:prstGeom>
-          <a:noFill/>
-        </p:spPr>
-        <p:txBody>
-          <a:bodyPr wrap="square" lIns="0" tIns="0" rIns="0" bIns="0" rtlCol="0">
-            <a:spAutoFit/>
-          </a:bodyPr>
-          <a:lstStyle/>
-          <a:p>
-            <a:pPr>
-              <a:lnSpc>
-                <a:spcPct val="150000"/>
-              </a:lnSpc>
-            </a:pPr>
-            <a:r>
-              <a:rPr lang="en-US" altLang="ko-KR" sz="1400" dirty="0">
-                <a:ln>
-                  <a:solidFill>
-                    <a:schemeClr val="tx1">
-                      <a:alpha val="0"/>
-                    </a:schemeClr>
-                  </a:solidFill>
-                </a:ln>
-                <a:latin typeface="맑은 고딕" panose="020B0503020000020004" pitchFamily="50" charset="-127"/>
-                <a:ea typeface="맑은 고딕" panose="020B0503020000020004" pitchFamily="50" charset="-127"/>
-                <a:cs typeface="Pretendard SemiBold" pitchFamily="50" charset="-127"/>
-              </a:rPr>
-              <a:t>- [2]</a:t>
-            </a:r>
-            <a:r>
-              <a:rPr lang="ko-KR" altLang="en-US" sz="1400" dirty="0">
-                <a:ln>
-                  <a:solidFill>
-                    <a:schemeClr val="tx1">
-                      <a:alpha val="0"/>
-                    </a:schemeClr>
-                  </a:solidFill>
-                </a:ln>
-                <a:latin typeface="맑은 고딕" panose="020B0503020000020004" pitchFamily="50" charset="-127"/>
-                <a:ea typeface="맑은 고딕" panose="020B0503020000020004" pitchFamily="50" charset="-127"/>
-                <a:cs typeface="Pretendard SemiBold" pitchFamily="50" charset="-127"/>
-              </a:rPr>
-              <a:t>부터 </a:t>
-            </a:r>
-            <a:r>
-              <a:rPr lang="en-US" altLang="ko-KR" sz="1400" dirty="0">
-                <a:ln>
-                  <a:solidFill>
-                    <a:schemeClr val="tx1">
-                      <a:alpha val="0"/>
-                    </a:schemeClr>
-                  </a:solidFill>
-                </a:ln>
-                <a:latin typeface="맑은 고딕" panose="020B0503020000020004" pitchFamily="50" charset="-127"/>
-                <a:ea typeface="맑은 고딕" panose="020B0503020000020004" pitchFamily="50" charset="-127"/>
-                <a:cs typeface="Pretendard SemiBold" pitchFamily="50" charset="-127"/>
-              </a:rPr>
-              <a:t>data 4</a:t>
-            </a:r>
-            <a:r>
-              <a:rPr lang="ko-KR" altLang="en-US" sz="1400" dirty="0">
-                <a:ln>
-                  <a:solidFill>
-                    <a:schemeClr val="tx1">
-                      <a:alpha val="0"/>
-                    </a:schemeClr>
-                  </a:solidFill>
-                </a:ln>
-                <a:latin typeface="맑은 고딕" panose="020B0503020000020004" pitchFamily="50" charset="-127"/>
-                <a:ea typeface="맑은 고딕" panose="020B0503020000020004" pitchFamily="50" charset="-127"/>
-                <a:cs typeface="Pretendard SemiBold" pitchFamily="50" charset="-127"/>
-              </a:rPr>
-              <a:t>개 입력</a:t>
-            </a:r>
-            <a:endParaRPr lang="en-US" altLang="ko-KR" sz="1400" dirty="0">
-              <a:ln>
-                <a:solidFill>
-                  <a:schemeClr val="tx1">
-                    <a:alpha val="0"/>
-                  </a:schemeClr>
-                </a:solidFill>
-              </a:ln>
-              <a:latin typeface="맑은 고딕" panose="020B0503020000020004" pitchFamily="50" charset="-127"/>
-              <a:ea typeface="맑은 고딕" panose="020B0503020000020004" pitchFamily="50" charset="-127"/>
-              <a:cs typeface="Pretendard SemiBold" pitchFamily="50" charset="-127"/>
-            </a:endParaRPr>
-          </a:p>
-          <a:p>
-            <a:pPr>
-              <a:lnSpc>
-                <a:spcPct val="150000"/>
-              </a:lnSpc>
-            </a:pPr>
-            <a:r>
-              <a:rPr lang="en-US" altLang="ko-KR" sz="1400" dirty="0">
-                <a:ln>
-                  <a:solidFill>
-                    <a:schemeClr val="tx1">
-                      <a:alpha val="0"/>
-                    </a:schemeClr>
-                  </a:solidFill>
-                </a:ln>
-                <a:latin typeface="맑은 고딕" panose="020B0503020000020004" pitchFamily="50" charset="-127"/>
-                <a:ea typeface="맑은 고딕" panose="020B0503020000020004" pitchFamily="50" charset="-127"/>
-                <a:cs typeface="Pretendard SemiBold" pitchFamily="50" charset="-127"/>
-              </a:rPr>
-              <a:t>- [0]</a:t>
-            </a:r>
-            <a:r>
-              <a:rPr lang="ko-KR" altLang="en-US" sz="1400" dirty="0">
-                <a:ln>
-                  <a:solidFill>
-                    <a:schemeClr val="tx1">
-                      <a:alpha val="0"/>
-                    </a:schemeClr>
-                  </a:solidFill>
-                </a:ln>
-                <a:latin typeface="맑은 고딕" panose="020B0503020000020004" pitchFamily="50" charset="-127"/>
-                <a:ea typeface="맑은 고딕" panose="020B0503020000020004" pitchFamily="50" charset="-127"/>
-                <a:cs typeface="Pretendard SemiBold" pitchFamily="50" charset="-127"/>
-              </a:rPr>
-              <a:t>에서 </a:t>
-            </a:r>
-            <a:r>
-              <a:rPr lang="en-US" altLang="ko-KR" sz="1400" dirty="0">
-                <a:ln>
-                  <a:solidFill>
-                    <a:schemeClr val="tx1">
-                      <a:alpha val="0"/>
-                    </a:schemeClr>
-                  </a:solidFill>
-                </a:ln>
-                <a:latin typeface="맑은 고딕" panose="020B0503020000020004" pitchFamily="50" charset="-127"/>
-                <a:ea typeface="맑은 고딕" panose="020B0503020000020004" pitchFamily="50" charset="-127"/>
-                <a:cs typeface="Pretendard SemiBold" pitchFamily="50" charset="-127"/>
-              </a:rPr>
-              <a:t>enqueue 5</a:t>
-            </a:r>
-            <a:r>
-              <a:rPr lang="ko-KR" altLang="en-US" sz="1400" dirty="0">
-                <a:ln>
-                  <a:solidFill>
-                    <a:schemeClr val="tx1">
-                      <a:alpha val="0"/>
-                    </a:schemeClr>
-                  </a:solidFill>
-                </a:ln>
-                <a:latin typeface="맑은 고딕" panose="020B0503020000020004" pitchFamily="50" charset="-127"/>
-                <a:ea typeface="맑은 고딕" panose="020B0503020000020004" pitchFamily="50" charset="-127"/>
-                <a:cs typeface="Pretendard SemiBold" pitchFamily="50" charset="-127"/>
-              </a:rPr>
-              <a:t>번</a:t>
-            </a:r>
-            <a:r>
-              <a:rPr lang="en-US" altLang="ko-KR" sz="1400" dirty="0">
-                <a:ln>
-                  <a:solidFill>
-                    <a:schemeClr val="tx1">
-                      <a:alpha val="0"/>
-                    </a:schemeClr>
-                  </a:solidFill>
-                </a:ln>
-                <a:latin typeface="맑은 고딕" panose="020B0503020000020004" pitchFamily="50" charset="-127"/>
-                <a:ea typeface="맑은 고딕" panose="020B0503020000020004" pitchFamily="50" charset="-127"/>
-                <a:cs typeface="Pretendard SemiBold" pitchFamily="50" charset="-127"/>
-              </a:rPr>
-              <a:t>,</a:t>
-            </a:r>
-            <a:r>
-              <a:rPr lang="en-US" altLang="ko-KR" sz="1400" dirty="0" err="1">
-                <a:ln>
-                  <a:solidFill>
-                    <a:schemeClr val="tx1">
-                      <a:alpha val="0"/>
-                    </a:schemeClr>
-                  </a:solidFill>
-                </a:ln>
-                <a:latin typeface="맑은 고딕" panose="020B0503020000020004" pitchFamily="50" charset="-127"/>
-                <a:ea typeface="맑은 고딕" panose="020B0503020000020004" pitchFamily="50" charset="-127"/>
-                <a:cs typeface="Pretendard SemiBold" pitchFamily="50" charset="-127"/>
-              </a:rPr>
-              <a:t>is_full</a:t>
-            </a:r>
-            <a:r>
-              <a:rPr lang="en-US" altLang="ko-KR" sz="1400" dirty="0">
-                <a:ln>
-                  <a:solidFill>
-                    <a:schemeClr val="tx1">
-                      <a:alpha val="0"/>
-                    </a:schemeClr>
-                  </a:solidFill>
-                </a:ln>
-                <a:latin typeface="맑은 고딕" panose="020B0503020000020004" pitchFamily="50" charset="-127"/>
-                <a:ea typeface="맑은 고딕" panose="020B0503020000020004" pitchFamily="50" charset="-127"/>
-                <a:cs typeface="Pretendard SemiBold" pitchFamily="50" charset="-127"/>
-              </a:rPr>
-              <a:t>()</a:t>
-            </a:r>
-            <a:r>
-              <a:rPr lang="ko-KR" altLang="en-US" sz="1400" dirty="0">
-                <a:ln>
-                  <a:solidFill>
-                    <a:schemeClr val="tx1">
-                      <a:alpha val="0"/>
-                    </a:schemeClr>
-                  </a:solidFill>
-                </a:ln>
-                <a:latin typeface="맑은 고딕" panose="020B0503020000020004" pitchFamily="50" charset="-127"/>
-                <a:ea typeface="맑은 고딕" panose="020B0503020000020004" pitchFamily="50" charset="-127"/>
-                <a:cs typeface="Pretendard SemiBold" pitchFamily="50" charset="-127"/>
-              </a:rPr>
-              <a:t>이 </a:t>
-            </a:r>
-            <a:r>
-              <a:rPr lang="en-US" altLang="ko-KR" sz="1400" dirty="0">
-                <a:ln>
-                  <a:solidFill>
-                    <a:schemeClr val="tx1">
-                      <a:alpha val="0"/>
-                    </a:schemeClr>
-                  </a:solidFill>
-                </a:ln>
-                <a:latin typeface="맑은 고딕" panose="020B0503020000020004" pitchFamily="50" charset="-127"/>
-                <a:ea typeface="맑은 고딕" panose="020B0503020000020004" pitchFamily="50" charset="-127"/>
-                <a:cs typeface="Pretendard SemiBold" pitchFamily="50" charset="-127"/>
-              </a:rPr>
-              <a:t>true</a:t>
-            </a:r>
-            <a:endParaRPr lang="ko-KR" altLang="en-US" sz="1400" dirty="0">
-              <a:ln>
-                <a:solidFill>
-                  <a:schemeClr val="tx1">
-                    <a:alpha val="0"/>
-                  </a:schemeClr>
-                </a:solidFill>
-              </a:ln>
-              <a:latin typeface="맑은 고딕" panose="020B0503020000020004" pitchFamily="50" charset="-127"/>
-              <a:ea typeface="맑은 고딕" panose="020B0503020000020004" pitchFamily="50" charset="-127"/>
-              <a:cs typeface="Pretendard SemiBold" pitchFamily="50" charset="-127"/>
-            </a:endParaRPr>
-          </a:p>
-        </p:txBody>
-      </p:sp>
       <p:graphicFrame>
         <p:nvGraphicFramePr>
           <p:cNvPr id="13" name="표 12">
@@ -7610,84 +7143,6 @@
           </p:txBody>
         </p:sp>
       </p:grpSp>
-      <p:sp>
-        <p:nvSpPr>
-          <p:cNvPr id="52" name="TextBox 51">
-            <a:extLst>
-              <a:ext uri="{FF2B5EF4-FFF2-40B4-BE49-F238E27FC236}">
-                <a16:creationId xmlns:a16="http://schemas.microsoft.com/office/drawing/2014/main" id="{F12F4B61-06F7-F7E5-D106-4573BC6201B0}"/>
-              </a:ext>
-            </a:extLst>
-          </p:cNvPr>
-          <p:cNvSpPr txBox="1"/>
-          <p:nvPr/>
-        </p:nvSpPr>
-        <p:spPr>
-          <a:xfrm>
-            <a:off x="5289908" y="4696299"/>
-            <a:ext cx="3202117" cy="281552"/>
-          </a:xfrm>
-          <a:prstGeom prst="rect">
-            <a:avLst/>
-          </a:prstGeom>
-          <a:noFill/>
-        </p:spPr>
-        <p:txBody>
-          <a:bodyPr wrap="square" lIns="0" tIns="0" rIns="0" bIns="0" rtlCol="0">
-            <a:spAutoFit/>
-          </a:bodyPr>
-          <a:lstStyle/>
-          <a:p>
-            <a:pPr marL="285750" indent="-285750">
-              <a:lnSpc>
-                <a:spcPct val="150000"/>
-              </a:lnSpc>
-              <a:buFontTx/>
-              <a:buChar char="-"/>
-            </a:pPr>
-            <a:r>
-              <a:rPr lang="en-US" altLang="ko-KR" sz="1400" dirty="0">
-                <a:ln>
-                  <a:solidFill>
-                    <a:schemeClr val="tx1">
-                      <a:alpha val="0"/>
-                    </a:schemeClr>
-                  </a:solidFill>
-                </a:ln>
-                <a:latin typeface="맑은 고딕" panose="020B0503020000020004" pitchFamily="50" charset="-127"/>
-                <a:cs typeface="Pretendard SemiBold" pitchFamily="50" charset="-127"/>
-              </a:rPr>
-              <a:t>enqueue() 2</a:t>
-            </a:r>
-            <a:r>
-              <a:rPr lang="ko-KR" altLang="en-US" sz="1400" dirty="0">
-                <a:ln>
-                  <a:solidFill>
-                    <a:schemeClr val="tx1">
-                      <a:alpha val="0"/>
-                    </a:schemeClr>
-                  </a:solidFill>
-                </a:ln>
-                <a:latin typeface="맑은 고딕" panose="020B0503020000020004" pitchFamily="50" charset="-127"/>
-                <a:cs typeface="Pretendard SemiBold" pitchFamily="50" charset="-127"/>
-              </a:rPr>
-              <a:t>번 진행</a:t>
-            </a:r>
-            <a:endParaRPr lang="ko-KR" altLang="en-US" sz="1400" dirty="0">
-              <a:ln>
-                <a:solidFill>
-                  <a:schemeClr val="tx1">
-                    <a:alpha val="0"/>
-                  </a:schemeClr>
-                </a:solidFill>
-              </a:ln>
-              <a:latin typeface="맑은 고딕" panose="020B0503020000020004" pitchFamily="50" charset="-127"/>
-              <a:ea typeface="맑은 고딕" panose="020B0503020000020004" pitchFamily="50" charset="-127"/>
-              <a:cs typeface="Pretendard SemiBold" pitchFamily="50" charset="-127"/>
-            </a:endParaRPr>
-          </a:p>
-        </p:txBody>
-      </p:sp>
       <p:pic>
         <p:nvPicPr>
           <p:cNvPr id="4" name="그림 3">
@@ -9890,142 +9345,6 @@
           </p:txBody>
         </p:sp>
       </p:grpSp>
-      <p:sp>
-        <p:nvSpPr>
-          <p:cNvPr id="67" name="TextBox 66">
-            <a:extLst>
-              <a:ext uri="{FF2B5EF4-FFF2-40B4-BE49-F238E27FC236}">
-                <a16:creationId xmlns:a16="http://schemas.microsoft.com/office/drawing/2014/main" id="{5893185D-DC65-3C80-80A0-26895A458559}"/>
-              </a:ext>
-            </a:extLst>
-          </p:cNvPr>
-          <p:cNvSpPr txBox="1"/>
-          <p:nvPr/>
-        </p:nvSpPr>
-        <p:spPr>
-          <a:xfrm>
-            <a:off x="6579618" y="811485"/>
-            <a:ext cx="3262753" cy="281487"/>
-          </a:xfrm>
-          <a:prstGeom prst="rect">
-            <a:avLst/>
-          </a:prstGeom>
-          <a:noFill/>
-        </p:spPr>
-        <p:txBody>
-          <a:bodyPr wrap="none" lIns="0" tIns="0" rIns="0" bIns="0" rtlCol="0">
-            <a:spAutoFit/>
-          </a:bodyPr>
-          <a:lstStyle/>
-          <a:p>
-            <a:pPr>
-              <a:lnSpc>
-                <a:spcPct val="150000"/>
-              </a:lnSpc>
-            </a:pPr>
-            <a:r>
-              <a:rPr lang="en-US" altLang="ko-KR" sz="1400" dirty="0"/>
-              <a:t>- dequeue () </a:t>
-            </a:r>
-            <a:r>
-              <a:rPr lang="ko-KR" altLang="en-US" sz="1400" dirty="0"/>
-              <a:t>시작 전</a:t>
-            </a:r>
-            <a:r>
-              <a:rPr lang="en-US" altLang="ko-KR" sz="1400" dirty="0"/>
-              <a:t>, Front</a:t>
-            </a:r>
-            <a:r>
-              <a:rPr lang="ko-KR" altLang="en-US" sz="1400" dirty="0"/>
-              <a:t>는 </a:t>
-            </a:r>
-            <a:r>
-              <a:rPr lang="en-US" altLang="ko-KR" sz="1400" dirty="0"/>
-              <a:t>[0]</a:t>
-            </a:r>
-            <a:r>
-              <a:rPr lang="ko-KR" altLang="en-US" sz="1400" dirty="0"/>
-              <a:t>에 위치</a:t>
-            </a:r>
-          </a:p>
-        </p:txBody>
-      </p:sp>
-      <p:sp>
-        <p:nvSpPr>
-          <p:cNvPr id="68" name="TextBox 67">
-            <a:extLst>
-              <a:ext uri="{FF2B5EF4-FFF2-40B4-BE49-F238E27FC236}">
-                <a16:creationId xmlns:a16="http://schemas.microsoft.com/office/drawing/2014/main" id="{61B8DDA9-7109-4E85-C947-AE39C88F3033}"/>
-              </a:ext>
-            </a:extLst>
-          </p:cNvPr>
-          <p:cNvSpPr txBox="1"/>
-          <p:nvPr/>
-        </p:nvSpPr>
-        <p:spPr>
-          <a:xfrm>
-            <a:off x="5386519" y="3657343"/>
-            <a:ext cx="3968093" cy="604717"/>
-          </a:xfrm>
-          <a:prstGeom prst="rect">
-            <a:avLst/>
-          </a:prstGeom>
-          <a:noFill/>
-        </p:spPr>
-        <p:txBody>
-          <a:bodyPr wrap="square" lIns="0" tIns="0" rIns="0" bIns="0" rtlCol="0">
-            <a:spAutoFit/>
-          </a:bodyPr>
-          <a:lstStyle/>
-          <a:p>
-            <a:pPr marL="285750" indent="-285750">
-              <a:lnSpc>
-                <a:spcPct val="150000"/>
-              </a:lnSpc>
-              <a:buFontTx/>
-              <a:buChar char="-"/>
-            </a:pPr>
-            <a:r>
-              <a:rPr lang="en-US" altLang="ko-KR" sz="1400" dirty="0"/>
-              <a:t>dequeue () 3</a:t>
-            </a:r>
-            <a:r>
-              <a:rPr lang="ko-KR" altLang="en-US" sz="1400" dirty="0"/>
-              <a:t>회</a:t>
-            </a:r>
-            <a:r>
-              <a:rPr lang="en-US" altLang="ko-KR" sz="1400" dirty="0"/>
-              <a:t> </a:t>
-            </a:r>
-            <a:r>
-              <a:rPr lang="ko-KR" altLang="en-US" sz="1400" dirty="0"/>
-              <a:t>완료</a:t>
-            </a:r>
-            <a:endParaRPr lang="en-US" altLang="ko-KR" sz="1400" dirty="0"/>
-          </a:p>
-          <a:p>
-            <a:pPr marL="285750" indent="-285750">
-              <a:lnSpc>
-                <a:spcPct val="150000"/>
-              </a:lnSpc>
-              <a:buFontTx/>
-              <a:buChar char="-"/>
-            </a:pPr>
-            <a:r>
-              <a:rPr lang="en-US" altLang="ko-KR" sz="1400" dirty="0" err="1"/>
-              <a:t>isFull</a:t>
-            </a:r>
-            <a:r>
-              <a:rPr lang="en-US" altLang="ko-KR" sz="1400" dirty="0"/>
-              <a:t>()</a:t>
-            </a:r>
-            <a:r>
-              <a:rPr lang="ko-KR" altLang="en-US" sz="1400" dirty="0"/>
-              <a:t> 상태</a:t>
-            </a:r>
-          </a:p>
-        </p:txBody>
-      </p:sp>
       <p:pic>
         <p:nvPicPr>
           <p:cNvPr id="4" name="그림 3">
@@ -11365,189 +10684,6 @@
           </p:txBody>
         </p:sp>
       </p:grpSp>
-      <p:sp>
-        <p:nvSpPr>
-          <p:cNvPr id="50" name="TextBox 49">
-            <a:extLst>
-              <a:ext uri="{FF2B5EF4-FFF2-40B4-BE49-F238E27FC236}">
-                <a16:creationId xmlns:a16="http://schemas.microsoft.com/office/drawing/2014/main" id="{FA0BEBDD-8EA1-97C5-4B1A-83AFCE00A4C0}"/>
-              </a:ext>
-            </a:extLst>
-          </p:cNvPr>
-          <p:cNvSpPr txBox="1"/>
-          <p:nvPr/>
-        </p:nvSpPr>
-        <p:spPr>
-          <a:xfrm>
-            <a:off x="6558998" y="2709074"/>
-            <a:ext cx="4086055" cy="281552"/>
-          </a:xfrm>
-          <a:prstGeom prst="rect">
-            <a:avLst/>
-          </a:prstGeom>
-          <a:noFill/>
-        </p:spPr>
-        <p:txBody>
-          <a:bodyPr wrap="none" lIns="0" tIns="0" rIns="0" bIns="0" rtlCol="0">
-            <a:spAutoFit/>
-          </a:bodyPr>
-          <a:lstStyle/>
-          <a:p>
-            <a:pPr>
-              <a:lnSpc>
-                <a:spcPct val="150000"/>
-              </a:lnSpc>
-            </a:pPr>
-            <a:r>
-              <a:rPr lang="en-US" altLang="ko-KR" sz="1400" dirty="0">
-                <a:ln>
-                  <a:solidFill>
-                    <a:schemeClr val="tx1">
-                      <a:alpha val="0"/>
-                    </a:schemeClr>
-                  </a:solidFill>
-                </a:ln>
-                <a:latin typeface="맑은 고딕" panose="020B0503020000020004" pitchFamily="50" charset="-127"/>
-                <a:ea typeface="맑은 고딕" panose="020B0503020000020004" pitchFamily="50" charset="-127"/>
-                <a:cs typeface="Pretendard SemiBold" pitchFamily="50" charset="-127"/>
-              </a:rPr>
-              <a:t>- enqueue() </a:t>
-            </a:r>
-            <a:r>
-              <a:rPr lang="ko-KR" altLang="en-US" sz="1400" dirty="0">
-                <a:ln>
-                  <a:solidFill>
-                    <a:schemeClr val="tx1">
-                      <a:alpha val="0"/>
-                    </a:schemeClr>
-                  </a:solidFill>
-                </a:ln>
-                <a:latin typeface="맑은 고딕" panose="020B0503020000020004" pitchFamily="50" charset="-127"/>
-                <a:ea typeface="맑은 고딕" panose="020B0503020000020004" pitchFamily="50" charset="-127"/>
-                <a:cs typeface="Pretendard SemiBold" pitchFamily="50" charset="-127"/>
-              </a:rPr>
-              <a:t>진행 시</a:t>
-            </a:r>
-            <a:r>
-              <a:rPr lang="en-US" altLang="ko-KR" sz="1400" dirty="0">
-                <a:ln>
-                  <a:solidFill>
-                    <a:schemeClr val="tx1">
-                      <a:alpha val="0"/>
-                    </a:schemeClr>
-                  </a:solidFill>
-                </a:ln>
-                <a:latin typeface="맑은 고딕" panose="020B0503020000020004" pitchFamily="50" charset="-127"/>
-                <a:ea typeface="맑은 고딕" panose="020B0503020000020004" pitchFamily="50" charset="-127"/>
-                <a:cs typeface="Pretendard SemiBold" pitchFamily="50" charset="-127"/>
-              </a:rPr>
-              <a:t>, size++ (</a:t>
-            </a:r>
-            <a:r>
-              <a:rPr lang="ko-KR" altLang="en-US" sz="1400" dirty="0">
-                <a:ln>
-                  <a:solidFill>
-                    <a:schemeClr val="tx1">
-                      <a:alpha val="0"/>
-                    </a:schemeClr>
-                  </a:solidFill>
-                </a:ln>
-                <a:latin typeface="맑은 고딕" panose="020B0503020000020004" pitchFamily="50" charset="-127"/>
-                <a:ea typeface="맑은 고딕" panose="020B0503020000020004" pitchFamily="50" charset="-127"/>
-                <a:cs typeface="Pretendard SemiBold" pitchFamily="50" charset="-127"/>
-              </a:rPr>
-              <a:t>단</a:t>
-            </a:r>
-            <a:r>
-              <a:rPr lang="en-US" altLang="ko-KR" sz="1400" dirty="0">
-                <a:ln>
-                  <a:solidFill>
-                    <a:schemeClr val="tx1">
-                      <a:alpha val="0"/>
-                    </a:schemeClr>
-                  </a:solidFill>
-                </a:ln>
-                <a:latin typeface="맑은 고딕" panose="020B0503020000020004" pitchFamily="50" charset="-127"/>
-                <a:ea typeface="맑은 고딕" panose="020B0503020000020004" pitchFamily="50" charset="-127"/>
-                <a:cs typeface="Pretendard SemiBold" pitchFamily="50" charset="-127"/>
-              </a:rPr>
-              <a:t>, </a:t>
-            </a:r>
-            <a:r>
-              <a:rPr lang="en-US" altLang="ko-KR" sz="1400" dirty="0" err="1">
-                <a:ln>
-                  <a:solidFill>
-                    <a:schemeClr val="tx1">
-                      <a:alpha val="0"/>
-                    </a:schemeClr>
-                  </a:solidFill>
-                </a:ln>
-                <a:latin typeface="맑은 고딕" panose="020B0503020000020004" pitchFamily="50" charset="-127"/>
-                <a:ea typeface="맑은 고딕" panose="020B0503020000020004" pitchFamily="50" charset="-127"/>
-                <a:cs typeface="Pretendard SemiBold" pitchFamily="50" charset="-127"/>
-              </a:rPr>
-              <a:t>isFull</a:t>
-            </a:r>
-            <a:r>
-              <a:rPr lang="en-US" altLang="ko-KR" sz="1400" dirty="0">
-                <a:ln>
-                  <a:solidFill>
-                    <a:schemeClr val="tx1">
-                      <a:alpha val="0"/>
-                    </a:schemeClr>
-                  </a:solidFill>
-                </a:ln>
-                <a:latin typeface="맑은 고딕" panose="020B0503020000020004" pitchFamily="50" charset="-127"/>
-                <a:ea typeface="맑은 고딕" panose="020B0503020000020004" pitchFamily="50" charset="-127"/>
-                <a:cs typeface="Pretendard SemiBold" pitchFamily="50" charset="-127"/>
-              </a:rPr>
-              <a:t>()</a:t>
-            </a:r>
-            <a:r>
-              <a:rPr lang="ko-KR" altLang="en-US" sz="1400" dirty="0">
-                <a:ln>
-                  <a:solidFill>
-                    <a:schemeClr val="tx1">
-                      <a:alpha val="0"/>
-                    </a:schemeClr>
-                  </a:solidFill>
-                </a:ln>
-                <a:latin typeface="맑은 고딕" panose="020B0503020000020004" pitchFamily="50" charset="-127"/>
-                <a:ea typeface="맑은 고딕" panose="020B0503020000020004" pitchFamily="50" charset="-127"/>
-                <a:cs typeface="Pretendard SemiBold" pitchFamily="50" charset="-127"/>
-              </a:rPr>
-              <a:t>일 때 제외</a:t>
-            </a:r>
-            <a:r>
-              <a:rPr lang="en-US" altLang="ko-KR" sz="1400" dirty="0">
-                <a:ln>
-                  <a:solidFill>
-                    <a:schemeClr val="tx1">
-                      <a:alpha val="0"/>
-                    </a:schemeClr>
-                  </a:solidFill>
-                </a:ln>
-                <a:latin typeface="맑은 고딕" panose="020B0503020000020004" pitchFamily="50" charset="-127"/>
-                <a:ea typeface="맑은 고딕" panose="020B0503020000020004" pitchFamily="50" charset="-127"/>
-                <a:cs typeface="Pretendard SemiBold" pitchFamily="50" charset="-127"/>
-              </a:rPr>
-              <a:t>)</a:t>
-            </a:r>
-            <a:endParaRPr lang="ko-KR" altLang="en-US" sz="1400" dirty="0">
-              <a:ln>
-                <a:solidFill>
-                  <a:schemeClr val="tx1">
-                    <a:alpha val="0"/>
-                  </a:schemeClr>
-                </a:solidFill>
-              </a:ln>
-              <a:latin typeface="맑은 고딕" panose="020B0503020000020004" pitchFamily="50" charset="-127"/>
-              <a:ea typeface="맑은 고딕" panose="020B0503020000020004" pitchFamily="50" charset="-127"/>
-              <a:cs typeface="Pretendard SemiBold" pitchFamily="50" charset="-127"/>
-            </a:endParaRPr>
-          </a:p>
-        </p:txBody>
-      </p:sp>
       <p:pic>
         <p:nvPicPr>
           <p:cNvPr id="4" name="그림 3">
@@ -11578,99 +10714,6 @@
           </a:prstGeom>
         </p:spPr>
       </p:pic>
-      <p:sp>
-        <p:nvSpPr>
-          <p:cNvPr id="12" name="TextBox 11">
-            <a:extLst>
-              <a:ext uri="{FF2B5EF4-FFF2-40B4-BE49-F238E27FC236}">
-                <a16:creationId xmlns:a16="http://schemas.microsoft.com/office/drawing/2014/main" id="{4EB54CCF-045E-D235-3A67-28D4DBF47115}"/>
-              </a:ext>
-            </a:extLst>
-          </p:cNvPr>
-          <p:cNvSpPr txBox="1"/>
-          <p:nvPr/>
-        </p:nvSpPr>
-        <p:spPr>
-          <a:xfrm>
-            <a:off x="6726825" y="526174"/>
-            <a:ext cx="2173672" cy="281552"/>
-          </a:xfrm>
-          <a:prstGeom prst="rect">
-            <a:avLst/>
-          </a:prstGeom>
-          <a:noFill/>
-        </p:spPr>
-        <p:txBody>
-          <a:bodyPr wrap="none" lIns="0" tIns="0" rIns="0" bIns="0" rtlCol="0">
-            <a:spAutoFit/>
-          </a:bodyPr>
-          <a:lstStyle/>
-          <a:p>
-            <a:pPr>
-              <a:lnSpc>
-                <a:spcPct val="150000"/>
-              </a:lnSpc>
-            </a:pPr>
-            <a:r>
-              <a:rPr lang="en-US" altLang="ko-KR" sz="1400" dirty="0">
-                <a:ln>
-                  <a:solidFill>
-                    <a:schemeClr val="tx1">
-                      <a:alpha val="0"/>
-                    </a:schemeClr>
-                  </a:solidFill>
-                </a:ln>
-                <a:latin typeface="맑은 고딕" panose="020B0503020000020004" pitchFamily="50" charset="-127"/>
-                <a:ea typeface="맑은 고딕" panose="020B0503020000020004" pitchFamily="50" charset="-127"/>
-                <a:cs typeface="Pretendard SemiBold" pitchFamily="50" charset="-127"/>
-              </a:rPr>
-              <a:t>- dequeue() </a:t>
-            </a:r>
-            <a:r>
-              <a:rPr lang="ko-KR" altLang="en-US" sz="1400" dirty="0">
-                <a:ln>
-                  <a:solidFill>
-                    <a:schemeClr val="tx1">
-                      <a:alpha val="0"/>
-                    </a:schemeClr>
-                  </a:solidFill>
-                </a:ln>
-                <a:latin typeface="맑은 고딕" panose="020B0503020000020004" pitchFamily="50" charset="-127"/>
-                <a:ea typeface="맑은 고딕" panose="020B0503020000020004" pitchFamily="50" charset="-127"/>
-                <a:cs typeface="Pretendard SemiBold" pitchFamily="50" charset="-127"/>
-              </a:rPr>
-              <a:t>진행 시</a:t>
-            </a:r>
-            <a:r>
-              <a:rPr lang="en-US" altLang="ko-KR" sz="1400" dirty="0">
-                <a:ln>
-                  <a:solidFill>
-                    <a:schemeClr val="tx1">
-                      <a:alpha val="0"/>
-                    </a:schemeClr>
-                  </a:solidFill>
-                </a:ln>
-                <a:latin typeface="맑은 고딕" panose="020B0503020000020004" pitchFamily="50" charset="-127"/>
-                <a:ea typeface="맑은 고딕" panose="020B0503020000020004" pitchFamily="50" charset="-127"/>
-                <a:cs typeface="Pretendard SemiBold" pitchFamily="50" charset="-127"/>
-              </a:rPr>
-              <a:t>, size--</a:t>
-            </a:r>
-            <a:endParaRPr lang="ko-KR" altLang="en-US" sz="1400" dirty="0">
-              <a:ln>
-                <a:solidFill>
-                  <a:schemeClr val="tx1">
-                    <a:alpha val="0"/>
-                  </a:schemeClr>
-                </a:solidFill>
-              </a:ln>
-              <a:latin typeface="맑은 고딕" panose="020B0503020000020004" pitchFamily="50" charset="-127"/>
-              <a:ea typeface="맑은 고딕" panose="020B0503020000020004" pitchFamily="50" charset="-127"/>
-              <a:cs typeface="Pretendard SemiBold" pitchFamily="50" charset="-127"/>
-            </a:endParaRPr>
-          </a:p>
-        </p:txBody>
-      </p:sp>
       <p:graphicFrame>
         <p:nvGraphicFramePr>
           <p:cNvPr id="13" name="표 12">
@@ -12625,149 +11668,6 @@
           </p:txBody>
         </p:sp>
       </p:grpSp>
-      <p:sp>
-        <p:nvSpPr>
-          <p:cNvPr id="20" name="TextBox 19">
-            <a:extLst>
-              <a:ext uri="{FF2B5EF4-FFF2-40B4-BE49-F238E27FC236}">
-                <a16:creationId xmlns:a16="http://schemas.microsoft.com/office/drawing/2014/main" id="{F48FD0ED-F27E-9C3B-5364-F6CB9FB5E42F}"/>
-              </a:ext>
-            </a:extLst>
-          </p:cNvPr>
-          <p:cNvSpPr txBox="1"/>
-          <p:nvPr/>
-        </p:nvSpPr>
-        <p:spPr>
-          <a:xfrm>
-            <a:off x="6609805" y="5607728"/>
-            <a:ext cx="2290692" cy="604717"/>
-          </a:xfrm>
-          <a:prstGeom prst="rect">
-            <a:avLst/>
-          </a:prstGeom>
-          <a:noFill/>
-        </p:spPr>
-        <p:txBody>
-          <a:bodyPr wrap="none" lIns="0" tIns="0" rIns="0" bIns="0" rtlCol="0">
-            <a:spAutoFit/>
-          </a:bodyPr>
-          <a:lstStyle/>
-          <a:p>
-            <a:pPr marL="285750" indent="-285750">
-              <a:lnSpc>
-                <a:spcPct val="150000"/>
-              </a:lnSpc>
-              <a:buFontTx/>
-              <a:buChar char="-"/>
-            </a:pPr>
-            <a:r>
-              <a:rPr lang="en-US" altLang="ko-KR" sz="1400" dirty="0">
-                <a:ln>
-                  <a:solidFill>
-                    <a:schemeClr val="tx1">
-                      <a:alpha val="0"/>
-                    </a:schemeClr>
-                  </a:solidFill>
-                </a:ln>
-                <a:latin typeface="맑은 고딕" panose="020B0503020000020004" pitchFamily="50" charset="-127"/>
-                <a:ea typeface="맑은 고딕" panose="020B0503020000020004" pitchFamily="50" charset="-127"/>
-                <a:cs typeface="Pretendard SemiBold" pitchFamily="50" charset="-127"/>
-              </a:rPr>
-              <a:t>enqueue() 5</a:t>
-            </a:r>
-            <a:r>
-              <a:rPr lang="ko-KR" altLang="en-US" sz="1400" dirty="0">
-                <a:ln>
-                  <a:solidFill>
-                    <a:schemeClr val="tx1">
-                      <a:alpha val="0"/>
-                    </a:schemeClr>
-                  </a:solidFill>
-                </a:ln>
-                <a:latin typeface="맑은 고딕" panose="020B0503020000020004" pitchFamily="50" charset="-127"/>
-                <a:ea typeface="맑은 고딕" panose="020B0503020000020004" pitchFamily="50" charset="-127"/>
-                <a:cs typeface="Pretendard SemiBold" pitchFamily="50" charset="-127"/>
-              </a:rPr>
-              <a:t>회 진행 완료</a:t>
-            </a:r>
-            <a:endParaRPr lang="en-US" altLang="ko-KR" sz="1400" dirty="0">
-              <a:ln>
-                <a:solidFill>
-                  <a:schemeClr val="tx1">
-                    <a:alpha val="0"/>
-                  </a:schemeClr>
-                </a:solidFill>
-              </a:ln>
-              <a:latin typeface="맑은 고딕" panose="020B0503020000020004" pitchFamily="50" charset="-127"/>
-              <a:ea typeface="맑은 고딕" panose="020B0503020000020004" pitchFamily="50" charset="-127"/>
-              <a:cs typeface="Pretendard SemiBold" pitchFamily="50" charset="-127"/>
-            </a:endParaRPr>
-          </a:p>
-          <a:p>
-            <a:pPr marL="285750" indent="-285750">
-              <a:lnSpc>
-                <a:spcPct val="150000"/>
-              </a:lnSpc>
-              <a:buFontTx/>
-              <a:buChar char="-"/>
-            </a:pPr>
-            <a:r>
-              <a:rPr lang="en-US" altLang="ko-KR" sz="1400" dirty="0" err="1">
-                <a:ln>
-                  <a:solidFill>
-                    <a:schemeClr val="tx1">
-                      <a:alpha val="0"/>
-                    </a:schemeClr>
-                  </a:solidFill>
-                </a:ln>
-                <a:latin typeface="맑은 고딕" panose="020B0503020000020004" pitchFamily="50" charset="-127"/>
-                <a:cs typeface="Pretendard SemiBold" pitchFamily="50" charset="-127"/>
-              </a:rPr>
-              <a:t>isFull</a:t>
-            </a:r>
-            <a:r>
-              <a:rPr lang="en-US" altLang="ko-KR" sz="1400" dirty="0">
-                <a:ln>
-                  <a:solidFill>
-                    <a:schemeClr val="tx1">
-                      <a:alpha val="0"/>
-                    </a:schemeClr>
-                  </a:solidFill>
-                </a:ln>
-                <a:latin typeface="맑은 고딕" panose="020B0503020000020004" pitchFamily="50" charset="-127"/>
-                <a:cs typeface="Pretendard SemiBold" pitchFamily="50" charset="-127"/>
-              </a:rPr>
-              <a:t>() </a:t>
-            </a:r>
-            <a:r>
-              <a:rPr lang="ko-KR" altLang="en-US" sz="1400" dirty="0">
-                <a:ln>
-                  <a:solidFill>
-                    <a:schemeClr val="tx1">
-                      <a:alpha val="0"/>
-                    </a:schemeClr>
-                  </a:solidFill>
-                </a:ln>
-                <a:latin typeface="맑은 고딕" panose="020B0503020000020004" pitchFamily="50" charset="-127"/>
-                <a:cs typeface="Pretendard SemiBold" pitchFamily="50" charset="-127"/>
-              </a:rPr>
-              <a:t>상태</a:t>
-            </a:r>
-            <a:endParaRPr lang="ko-KR" altLang="en-US" sz="1400" dirty="0">
-              <a:ln>
-                <a:solidFill>
-                  <a:schemeClr val="tx1">
-                    <a:alpha val="0"/>
-                  </a:schemeClr>
-                </a:solidFill>
-              </a:ln>
-              <a:latin typeface="맑은 고딕" panose="020B0503020000020004" pitchFamily="50" charset="-127"/>
-              <a:ea typeface="맑은 고딕" panose="020B0503020000020004" pitchFamily="50" charset="-127"/>
-              <a:cs typeface="Pretendard SemiBold" pitchFamily="50" charset="-127"/>
-            </a:endParaRPr>
-          </a:p>
-        </p:txBody>
-      </p:sp>
       <p:sp>
         <p:nvSpPr>
           <p:cNvPr id="21" name="TextBox 20">
@@ -14165,53 +13065,6 @@
       </p:grpSp>
       <p:sp>
         <p:nvSpPr>
-          <p:cNvPr id="2" name="TextBox 1">
-            <a:extLst>
-              <a:ext uri="{FF2B5EF4-FFF2-40B4-BE49-F238E27FC236}">
-                <a16:creationId xmlns:a16="http://schemas.microsoft.com/office/drawing/2014/main" id="{0B46F46A-D777-0AFB-51BF-E7FC9C47F568}"/>
-              </a:ext>
-            </a:extLst>
-          </p:cNvPr>
-          <p:cNvSpPr txBox="1"/>
-          <p:nvPr/>
-        </p:nvSpPr>
-        <p:spPr>
-          <a:xfrm>
-            <a:off x="7506817" y="1643128"/>
-            <a:ext cx="4603820" cy="281552"/>
-          </a:xfrm>
-          <a:prstGeom prst="rect">
-            <a:avLst/>
-          </a:prstGeom>
-          <a:noFill/>
-        </p:spPr>
-        <p:txBody>
-          <a:bodyPr wrap="square" lIns="0" tIns="0" rIns="0" bIns="0" rtlCol="0">
-            <a:spAutoFit/>
-          </a:bodyPr>
-          <a:lstStyle/>
-          <a:p>
-            <a:pPr marL="285750" indent="-285750">
-              <a:lnSpc>
-                <a:spcPct val="150000"/>
-              </a:lnSpc>
-              <a:buFontTx/>
-              <a:buChar char="-"/>
-            </a:pPr>
-            <a:r>
-              <a:rPr lang="en-US" altLang="ko-KR" sz="1400" dirty="0"/>
-              <a:t>Front = 0, size = 3</a:t>
-            </a:r>
-            <a:r>
-              <a:rPr lang="ko-KR" altLang="en-US" sz="1400" dirty="0"/>
-              <a:t>인 상태</a:t>
-            </a:r>
-            <a:endParaRPr lang="en-US" altLang="ko-KR" sz="1400" dirty="0"/>
-          </a:p>
-        </p:txBody>
-      </p:sp>
-      <p:sp>
-        <p:nvSpPr>
           <p:cNvPr id="19" name="TextBox 18">
             <a:extLst>
               <a:ext uri="{FF2B5EF4-FFF2-40B4-BE49-F238E27FC236}">
@@ -14249,7 +13102,7 @@
             </a:r>
             <a:r>
               <a:rPr lang="en-US" altLang="ko-KR" sz="1400" dirty="0"/>
-              <a:t>.front</a:t>
+              <a:t>. front</a:t>
             </a:r>
             <a:r>
               <a:rPr lang="ko-KR" altLang="en-US" sz="1400" dirty="0"/>
@@ -15645,70 +14498,6 @@
           </p:txBody>
         </p:sp>
       </p:grpSp>
-      <p:sp>
-        <p:nvSpPr>
-          <p:cNvPr id="67" name="TextBox 66">
-            <a:extLst>
-              <a:ext uri="{FF2B5EF4-FFF2-40B4-BE49-F238E27FC236}">
-                <a16:creationId xmlns:a16="http://schemas.microsoft.com/office/drawing/2014/main" id="{68F17B39-E070-5441-4397-710659CE0A15}"/>
-              </a:ext>
-            </a:extLst>
-          </p:cNvPr>
-          <p:cNvSpPr txBox="1"/>
-          <p:nvPr/>
-        </p:nvSpPr>
-        <p:spPr>
-          <a:xfrm>
-            <a:off x="7042148" y="3194508"/>
-            <a:ext cx="1760097" cy="604717"/>
-          </a:xfrm>
-          <a:prstGeom prst="rect">
-            <a:avLst/>
-          </a:prstGeom>
-          <a:noFill/>
-        </p:spPr>
-        <p:txBody>
-          <a:bodyPr wrap="none" lIns="0" tIns="0" rIns="0" bIns="0" rtlCol="0">
-            <a:spAutoFit/>
-          </a:bodyPr>
-          <a:lstStyle/>
-          <a:p>
-            <a:pPr marL="285750" indent="-285750">
-              <a:lnSpc>
-                <a:spcPct val="150000"/>
-              </a:lnSpc>
-              <a:buFontTx/>
-              <a:buChar char="-"/>
-            </a:pPr>
-            <a:r>
-              <a:rPr lang="en-US" altLang="ko-KR" sz="1400" dirty="0"/>
-              <a:t>[0]~[2] </a:t>
-            </a:r>
-            <a:r>
-              <a:rPr lang="ko-KR" altLang="en-US" sz="1400" dirty="0"/>
-              <a:t>입력</a:t>
-            </a:r>
-            <a:endParaRPr lang="en-US" altLang="ko-KR" sz="1400" dirty="0"/>
-          </a:p>
-          <a:p>
-            <a:pPr marL="285750" indent="-285750">
-              <a:lnSpc>
-                <a:spcPct val="150000"/>
-              </a:lnSpc>
-              <a:buFontTx/>
-              <a:buChar char="-"/>
-            </a:pPr>
-            <a:r>
-              <a:rPr lang="en-US" altLang="ko-KR" sz="1400" dirty="0"/>
-              <a:t>enqueue 3</a:t>
-            </a:r>
-            <a:r>
-              <a:rPr lang="ko-KR" altLang="en-US" sz="1400" dirty="0"/>
-              <a:t>회 진행</a:t>
-            </a:r>
-          </a:p>
-        </p:txBody>
-      </p:sp>
       <p:graphicFrame>
         <p:nvGraphicFramePr>
           <p:cNvPr id="21" name="표 20">
@@ -16734,8 +15523,8 @@
         </p:blipFill>
         <p:spPr>
           <a:xfrm>
-            <a:off x="277325" y="2422153"/>
-            <a:ext cx="4599524" cy="2013694"/>
+            <a:off x="183451" y="2522656"/>
+            <a:ext cx="4929051" cy="2157963"/>
           </a:xfrm>
           <a:prstGeom prst="rect">
             <a:avLst/>
@@ -16800,6 +15589,104 @@
                 <a:srgbClr val="FF0000"/>
               </a:solidFill>
             </a:endParaRPr>
+          </a:p>
+        </p:txBody>
+      </p:sp>
+      <p:sp>
+        <p:nvSpPr>
+          <p:cNvPr id="2" name="화살표: 오른쪽 1">
+            <a:extLst>
+              <a:ext uri="{FF2B5EF4-FFF2-40B4-BE49-F238E27FC236}">
+                <a16:creationId xmlns:a16="http://schemas.microsoft.com/office/drawing/2014/main" id="{89E77350-F6EC-F465-8A72-124070C317C4}"/>
+              </a:ext>
+            </a:extLst>
+          </p:cNvPr>
+          <p:cNvSpPr/>
+          <p:nvPr/>
+        </p:nvSpPr>
+        <p:spPr>
+          <a:xfrm>
+            <a:off x="-67176" y="3934990"/>
+            <a:ext cx="501253" cy="138891"/>
+          </a:xfrm>
+          <a:prstGeom prst="rightArrow">
+            <a:avLst/>
+          </a:prstGeom>
+          <a:solidFill>
+            <a:schemeClr val="tx1"/>
+          </a:solidFill>
+        </p:spPr>
+        <p:style>
+          <a:lnRef idx="2">
+            <a:schemeClr val="accent1">
+              <a:shade val="15000"/>
+            </a:schemeClr>
+          </a:lnRef>
+          <a:fillRef idx="1">
+            <a:schemeClr val="accent1"/>
+          </a:fillRef>
+          <a:effectRef idx="0">
+            <a:schemeClr val="accent1"/>
+          </a:effectRef>
+          <a:fontRef idx="minor">
+            <a:schemeClr val="lt1"/>
+          </a:fontRef>
+        </p:style>
+        <p:txBody>
+          <a:bodyPr rtlCol="0" anchor="ctr"/>
+          <a:lstStyle/>
+          <a:p>
+            <a:pPr algn="ctr"/>
+            <a:endParaRPr lang="ko-KR" altLang="en-US"/>
+          </a:p>
+        </p:txBody>
+      </p:sp>
+      <p:sp>
+        <p:nvSpPr>
+          <p:cNvPr id="4" name="화살표: 오른쪽 3">
+            <a:extLst>
+              <a:ext uri="{FF2B5EF4-FFF2-40B4-BE49-F238E27FC236}">
+                <a16:creationId xmlns:a16="http://schemas.microsoft.com/office/drawing/2014/main" id="{EE0E569B-890A-55F5-D9F8-6D30CE85DA97}"/>
+              </a:ext>
+            </a:extLst>
+          </p:cNvPr>
+          <p:cNvSpPr/>
+          <p:nvPr/>
+        </p:nvSpPr>
+        <p:spPr>
+          <a:xfrm>
+            <a:off x="-67177" y="4474778"/>
+            <a:ext cx="501253" cy="138891"/>
+          </a:xfrm>
+          <a:prstGeom prst="rightArrow">
+            <a:avLst/>
+          </a:prstGeom>
+          <a:solidFill>
+            <a:schemeClr val="tx1"/>
+          </a:solidFill>
+        </p:spPr>
+        <p:style>
+          <a:lnRef idx="2">
+            <a:schemeClr val="accent1">
+              <a:shade val="15000"/>
+            </a:schemeClr>
+          </a:lnRef>
+          <a:fillRef idx="1">
+            <a:schemeClr val="accent1"/>
+          </a:fillRef>
+          <a:effectRef idx="0">
+            <a:schemeClr val="accent1"/>
+          </a:effectRef>
+          <a:fontRef idx="minor">
+            <a:schemeClr val="lt1"/>
+          </a:fontRef>
+        </p:style>
+        <p:txBody>
+          <a:bodyPr rtlCol="0" anchor="ctr"/>
+          <a:lstStyle/>
+          <a:p>
+            <a:pPr algn="ctr"/>
+            <a:endParaRPr lang="ko-KR" altLang="en-US"/>
           </a:p>
         </p:txBody>
       </p:sp>
@@ -17137,13 +16024,13 @@
           <p:nvPr>
             <p:extLst>
               <p:ext uri="{D42A27DB-BD31-4B8C-83A1-F6EECF244321}">
-                <p14:modId xmlns:p14="http://schemas.microsoft.com/office/powerpoint/2010/main" val="4258171709"/>
+                <p14:modId xmlns:p14="http://schemas.microsoft.com/office/powerpoint/2010/main" val="2645776523"/>
               </p:ext>
             </p:extLst>
           </p:nvPr>
         </p:nvGraphicFramePr>
         <p:xfrm>
-          <a:off x="5522200" y="1992380"/>
+          <a:off x="5522200" y="729636"/>
           <a:ext cx="5682745" cy="731520"/>
         </p:xfrm>
         <a:graphic>
@@ -17831,7 +16718,7 @@
         </p:nvGrpSpPr>
         <p:grpSpPr>
           <a:xfrm>
-            <a:off x="9099656" y="2732675"/>
+            <a:off x="9099656" y="1469931"/>
             <a:ext cx="827314" cy="715199"/>
             <a:chOff x="8596086" y="2744558"/>
             <a:chExt cx="827314" cy="715199"/>
@@ -17965,13 +16852,13 @@
           <p:nvPr>
             <p:extLst>
               <p:ext uri="{D42A27DB-BD31-4B8C-83A1-F6EECF244321}">
-                <p14:modId xmlns:p14="http://schemas.microsoft.com/office/powerpoint/2010/main" val="3267394403"/>
+                <p14:modId xmlns:p14="http://schemas.microsoft.com/office/powerpoint/2010/main" val="3285098745"/>
               </p:ext>
             </p:extLst>
           </p:nvPr>
         </p:nvGraphicFramePr>
         <p:xfrm>
-          <a:off x="5529457" y="4537503"/>
+          <a:off x="5529457" y="5251608"/>
           <a:ext cx="5682745" cy="731520"/>
         </p:xfrm>
         <a:graphic>
@@ -18464,7 +17351,7 @@
                             <a:schemeClr val="tx1"/>
                           </a:solidFill>
                         </a:rPr>
-                        <a:t>-</a:t>
+                        <a:t>30</a:t>
                       </a:r>
                       <a:endParaRPr lang="ko-KR" altLang="en-US" dirty="0">
                         <a:solidFill>
@@ -18659,7 +17546,7 @@
         </p:nvSpPr>
         <p:spPr>
           <a:xfrm>
-            <a:off x="5529457" y="4045676"/>
+            <a:off x="5529457" y="4759781"/>
             <a:ext cx="827314" cy="306099"/>
           </a:xfrm>
           <a:prstGeom prst="roundRect">
@@ -18718,7 +17605,7 @@
         </p:nvGrpSpPr>
         <p:grpSpPr>
           <a:xfrm>
-            <a:off x="7953034" y="5285057"/>
+            <a:off x="7953034" y="5999162"/>
             <a:ext cx="827314" cy="715199"/>
             <a:chOff x="8596086" y="2744558"/>
             <a:chExt cx="827314" cy="715199"/>
@@ -18851,7 +17738,7 @@
         </p:nvGrpSpPr>
         <p:grpSpPr>
           <a:xfrm>
-            <a:off x="5682343" y="1308172"/>
+            <a:off x="5682343" y="45428"/>
             <a:ext cx="827314" cy="625293"/>
             <a:chOff x="7910524" y="234700"/>
             <a:chExt cx="827314" cy="625293"/>
@@ -18977,7 +17864,7 @@
         </p:nvSpPr>
         <p:spPr>
           <a:xfrm>
-            <a:off x="6509657" y="4142492"/>
+            <a:off x="6509657" y="4856597"/>
             <a:ext cx="1238720" cy="232820"/>
           </a:xfrm>
           <a:prstGeom prst="rightArrow">
@@ -19026,7 +17913,7 @@
         </p:nvSpPr>
         <p:spPr>
           <a:xfrm>
-            <a:off x="5682343" y="5708396"/>
+            <a:off x="5682343" y="6422501"/>
             <a:ext cx="1964863" cy="205841"/>
           </a:xfrm>
           <a:prstGeom prst="rightArrow">
@@ -19075,7 +17962,7 @@
         </p:nvSpPr>
         <p:spPr>
           <a:xfrm>
-            <a:off x="9926970" y="5679234"/>
+            <a:off x="9926970" y="6393339"/>
             <a:ext cx="1190183" cy="214213"/>
           </a:xfrm>
           <a:prstGeom prst="rightArrow">
@@ -19107,125 +17994,6 @@
           <a:p>
             <a:pPr algn="ctr"/>
             <a:endParaRPr lang="ko-KR" altLang="en-US"/>
-          </a:p>
-        </p:txBody>
-      </p:sp>
-      <p:sp>
-        <p:nvSpPr>
-          <p:cNvPr id="45" name="TextBox 44">
-            <a:extLst>
-              <a:ext uri="{FF2B5EF4-FFF2-40B4-BE49-F238E27FC236}">
-                <a16:creationId xmlns:a16="http://schemas.microsoft.com/office/drawing/2014/main" id="{65C666C3-B18B-644D-79C1-EEB998839E8C}"/>
-              </a:ext>
-            </a:extLst>
-          </p:cNvPr>
-          <p:cNvSpPr txBox="1"/>
-          <p:nvPr/>
-        </p:nvSpPr>
-        <p:spPr>
-          <a:xfrm>
-            <a:off x="5522200" y="2888115"/>
-            <a:ext cx="3389720" cy="927883"/>
-          </a:xfrm>
-          <a:prstGeom prst="rect">
-            <a:avLst/>
-          </a:prstGeom>
-          <a:noFill/>
-        </p:spPr>
-        <p:txBody>
-          <a:bodyPr wrap="square" lIns="0" tIns="0" rIns="0" bIns="0" rtlCol="0">
-            <a:spAutoFit/>
-          </a:bodyPr>
-          <a:lstStyle/>
-          <a:p>
-            <a:pPr marL="285750" indent="-285750">
-              <a:lnSpc>
-                <a:spcPct val="150000"/>
-              </a:lnSpc>
-              <a:buFontTx/>
-              <a:buChar char="-"/>
-            </a:pPr>
-            <a:r>
-              <a:rPr lang="en-US" altLang="ko-KR" sz="1400" dirty="0"/>
-              <a:t>enqueue 4</a:t>
-            </a:r>
-            <a:r>
-              <a:rPr lang="ko-KR" altLang="en-US" sz="1400" dirty="0"/>
-              <a:t>회 진행</a:t>
-            </a:r>
-            <a:endParaRPr lang="en-US" altLang="ko-KR" sz="1400" dirty="0"/>
-          </a:p>
-          <a:p>
-            <a:pPr marL="285750" indent="-285750">
-              <a:lnSpc>
-                <a:spcPct val="150000"/>
-              </a:lnSpc>
-              <a:buFontTx/>
-              <a:buChar char="-"/>
-            </a:pPr>
-            <a:r>
-              <a:rPr lang="en-US" altLang="ko-KR" sz="1400" dirty="0"/>
-              <a:t>Rear</a:t>
-            </a:r>
-            <a:r>
-              <a:rPr lang="ko-KR" altLang="en-US" sz="1400" dirty="0"/>
-              <a:t>가 </a:t>
-            </a:r>
-            <a:r>
-              <a:rPr lang="en-US" altLang="ko-KR" sz="1400" dirty="0"/>
-              <a:t>0</a:t>
-            </a:r>
-            <a:r>
-              <a:rPr lang="ko-KR" altLang="en-US" sz="1400" dirty="0"/>
-              <a:t>번 인덱스에 위치할 때</a:t>
-            </a:r>
-            <a:r>
-              <a:rPr lang="en-US" altLang="ko-KR" sz="1400" dirty="0"/>
-              <a:t>, </a:t>
-            </a:r>
-            <a:r>
-              <a:rPr lang="en-US" altLang="ko-KR" sz="1400" dirty="0" err="1"/>
-              <a:t>isFull</a:t>
-            </a:r>
-            <a:endParaRPr lang="en-US" altLang="ko-KR" sz="1400" dirty="0"/>
-          </a:p>
-          <a:p>
-            <a:pPr marL="285750" indent="-285750">
-              <a:lnSpc>
-                <a:spcPct val="150000"/>
-              </a:lnSpc>
-              <a:buFontTx/>
-              <a:buChar char="-"/>
-            </a:pPr>
-            <a:r>
-              <a:rPr lang="en-US" altLang="ko-KR" sz="1400" dirty="0"/>
-              <a:t>Front </a:t>
-            </a:r>
-            <a:r>
-              <a:rPr lang="ko-KR" altLang="en-US" sz="1400" dirty="0"/>
-              <a:t>도 </a:t>
-            </a:r>
-            <a:r>
-              <a:rPr lang="en-US" altLang="ko-KR" sz="1400" dirty="0"/>
-              <a:t>rear</a:t>
-            </a:r>
-            <a:r>
-              <a:rPr lang="ko-KR" altLang="en-US" sz="1400" dirty="0"/>
-              <a:t>와 같이 움직임 </a:t>
-            </a:r>
-            <a:r>
-              <a:rPr lang="en-US" altLang="ko-KR" sz="1400" dirty="0"/>
-              <a:t>(</a:t>
-            </a:r>
-            <a:r>
-              <a:rPr lang="en-US" altLang="ko-KR" sz="1400" dirty="0" err="1"/>
-              <a:t>isFull</a:t>
-            </a:r>
-            <a:r>
-              <a:rPr lang="en-US" altLang="ko-KR" sz="1400" dirty="0"/>
-              <a:t>)</a:t>
-            </a:r>
-            <a:endParaRPr lang="ko-KR" altLang="en-US" sz="1400" dirty="0"/>
           </a:p>
         </p:txBody>
       </p:sp>
@@ -19273,7 +18041,7 @@
         </p:nvGrpSpPr>
         <p:grpSpPr>
           <a:xfrm>
-            <a:off x="7910783" y="3927166"/>
+            <a:off x="7910783" y="4641271"/>
             <a:ext cx="827314" cy="625293"/>
             <a:chOff x="7910524" y="234700"/>
             <a:chExt cx="827314" cy="625293"/>
@@ -19401,7 +18169,7 @@
         </p:nvSpPr>
         <p:spPr>
           <a:xfrm>
-            <a:off x="9086176" y="5673175"/>
+            <a:off x="9086176" y="6387280"/>
             <a:ext cx="827314" cy="306099"/>
           </a:xfrm>
           <a:prstGeom prst="roundRect">
@@ -19443,6 +18211,1107 @@
                 <a:srgbClr val="FF0000"/>
               </a:solidFill>
             </a:endParaRPr>
+          </a:p>
+        </p:txBody>
+      </p:sp>
+      <p:graphicFrame>
+        <p:nvGraphicFramePr>
+          <p:cNvPr id="2" name="표 1">
+            <a:extLst>
+              <a:ext uri="{FF2B5EF4-FFF2-40B4-BE49-F238E27FC236}">
+                <a16:creationId xmlns:a16="http://schemas.microsoft.com/office/drawing/2014/main" id="{06A8EE09-710B-A007-C94E-3BDBA0E20D2F}"/>
+              </a:ext>
+            </a:extLst>
+          </p:cNvPr>
+          <p:cNvGraphicFramePr>
+            <a:graphicFrameLocks noGrp="1"/>
+          </p:cNvGraphicFramePr>
+          <p:nvPr>
+            <p:extLst>
+              <p:ext uri="{D42A27DB-BD31-4B8C-83A1-F6EECF244321}">
+                <p14:modId xmlns:p14="http://schemas.microsoft.com/office/powerpoint/2010/main" val="2031039781"/>
+              </p:ext>
+            </p:extLst>
+          </p:nvPr>
+        </p:nvGraphicFramePr>
+        <p:xfrm>
+          <a:off x="5483007" y="2858888"/>
+          <a:ext cx="5682745" cy="731520"/>
+        </p:xfrm>
+        <a:graphic>
+          <a:graphicData uri="http://schemas.openxmlformats.org/drawingml/2006/table">
+            <a:tbl>
+              <a:tblPr firstRow="1" bandRow="1">
+                <a:tableStyleId>{5C22544A-7EE6-4342-B048-85BDC9FD1C3A}</a:tableStyleId>
+              </a:tblPr>
+              <a:tblGrid>
+                <a:gridCol w="1136549">
+                  <a:extLst>
+                    <a:ext uri="{9D8B030D-6E8A-4147-A177-3AD203B41FA5}">
+                      <a16:colId xmlns:a16="http://schemas.microsoft.com/office/drawing/2014/main" val="2978345313"/>
+                    </a:ext>
+                  </a:extLst>
+                </a:gridCol>
+                <a:gridCol w="1136549">
+                  <a:extLst>
+                    <a:ext uri="{9D8B030D-6E8A-4147-A177-3AD203B41FA5}">
+                      <a16:colId xmlns:a16="http://schemas.microsoft.com/office/drawing/2014/main" val="516520693"/>
+                    </a:ext>
+                  </a:extLst>
+                </a:gridCol>
+                <a:gridCol w="1136549">
+                  <a:extLst>
+                    <a:ext uri="{9D8B030D-6E8A-4147-A177-3AD203B41FA5}">
+                      <a16:colId xmlns:a16="http://schemas.microsoft.com/office/drawing/2014/main" val="411927753"/>
+                    </a:ext>
+                  </a:extLst>
+                </a:gridCol>
+                <a:gridCol w="1136549">
+                  <a:extLst>
+                    <a:ext uri="{9D8B030D-6E8A-4147-A177-3AD203B41FA5}">
+                      <a16:colId xmlns:a16="http://schemas.microsoft.com/office/drawing/2014/main" val="2282447059"/>
+                    </a:ext>
+                  </a:extLst>
+                </a:gridCol>
+                <a:gridCol w="1136549">
+                  <a:extLst>
+                    <a:ext uri="{9D8B030D-6E8A-4147-A177-3AD203B41FA5}">
+                      <a16:colId xmlns:a16="http://schemas.microsoft.com/office/drawing/2014/main" val="1506443707"/>
+                    </a:ext>
+                  </a:extLst>
+                </a:gridCol>
+              </a:tblGrid>
+              <a:tr h="295187">
+                <a:tc>
+                  <a:txBody>
+                    <a:bodyPr/>
+                    <a:lstStyle/>
+                    <a:p>
+                      <a:pPr algn="ctr" latinLnBrk="1"/>
+                      <a:r>
+                        <a:rPr lang="en-US" altLang="ko-KR" b="0" dirty="0">
+                          <a:solidFill>
+                            <a:schemeClr val="tx1"/>
+                          </a:solidFill>
+                        </a:rPr>
+                        <a:t>[0]</a:t>
+                      </a:r>
+                      <a:endParaRPr lang="ko-KR" altLang="en-US" b="0" dirty="0">
+                        <a:solidFill>
+                          <a:schemeClr val="tx1"/>
+                        </a:solidFill>
+                      </a:endParaRPr>
+                    </a:p>
+                  </a:txBody>
+                  <a:tcPr>
+                    <a:lnL w="12700" cap="flat" cmpd="sng" algn="ctr">
+                      <a:solidFill>
+                        <a:schemeClr val="tx1"/>
+                      </a:solidFill>
+                      <a:prstDash val="solid"/>
+                      <a:round/>
+                      <a:headEnd type="none" w="med" len="med"/>
+                      <a:tailEnd type="none" w="med" len="med"/>
+                    </a:lnL>
+                    <a:lnR w="12700" cap="flat" cmpd="sng" algn="ctr">
+                      <a:solidFill>
+                        <a:schemeClr val="tx1"/>
+                      </a:solidFill>
+                      <a:prstDash val="solid"/>
+                      <a:round/>
+                      <a:headEnd type="none" w="med" len="med"/>
+                      <a:tailEnd type="none" w="med" len="med"/>
+                    </a:lnR>
+                    <a:lnT w="12700" cap="flat" cmpd="sng" algn="ctr">
+                      <a:solidFill>
+                        <a:schemeClr val="tx1"/>
+                      </a:solidFill>
+                      <a:prstDash val="solid"/>
+                      <a:round/>
+                      <a:headEnd type="none" w="med" len="med"/>
+                      <a:tailEnd type="none" w="med" len="med"/>
+                    </a:lnT>
+                    <a:lnB w="12700" cap="flat" cmpd="sng" algn="ctr">
+                      <a:solidFill>
+                        <a:schemeClr val="tx1"/>
+                      </a:solidFill>
+                      <a:prstDash val="solid"/>
+                      <a:round/>
+                      <a:headEnd type="none" w="med" len="med"/>
+                      <a:tailEnd type="none" w="med" len="med"/>
+                    </a:lnB>
+                    <a:noFill/>
+                  </a:tcPr>
+                </a:tc>
+                <a:tc>
+                  <a:txBody>
+                    <a:bodyPr/>
+                    <a:lstStyle/>
+                    <a:p>
+                      <a:pPr algn="ctr" latinLnBrk="1"/>
+                      <a:r>
+                        <a:rPr lang="en-US" altLang="ko-KR" b="0" dirty="0">
+                          <a:solidFill>
+                            <a:schemeClr val="tx1"/>
+                          </a:solidFill>
+                        </a:rPr>
+                        <a:t>[1]</a:t>
+                      </a:r>
+                      <a:endParaRPr lang="ko-KR" altLang="en-US" dirty="0">
+                        <a:solidFill>
+                          <a:schemeClr val="tx1"/>
+                        </a:solidFill>
+                      </a:endParaRPr>
+                    </a:p>
+                  </a:txBody>
+                  <a:tcPr>
+                    <a:lnL w="12700" cap="flat" cmpd="sng" algn="ctr">
+                      <a:solidFill>
+                        <a:schemeClr val="tx1"/>
+                      </a:solidFill>
+                      <a:prstDash val="solid"/>
+                      <a:round/>
+                      <a:headEnd type="none" w="med" len="med"/>
+                      <a:tailEnd type="none" w="med" len="med"/>
+                    </a:lnL>
+                    <a:lnR w="12700" cap="flat" cmpd="sng" algn="ctr">
+                      <a:solidFill>
+                        <a:schemeClr val="tx1"/>
+                      </a:solidFill>
+                      <a:prstDash val="solid"/>
+                      <a:round/>
+                      <a:headEnd type="none" w="med" len="med"/>
+                      <a:tailEnd type="none" w="med" len="med"/>
+                    </a:lnR>
+                    <a:lnT w="12700" cap="flat" cmpd="sng" algn="ctr">
+                      <a:solidFill>
+                        <a:schemeClr val="tx1"/>
+                      </a:solidFill>
+                      <a:prstDash val="solid"/>
+                      <a:round/>
+                      <a:headEnd type="none" w="med" len="med"/>
+                      <a:tailEnd type="none" w="med" len="med"/>
+                    </a:lnT>
+                    <a:lnB w="12700" cap="flat" cmpd="sng" algn="ctr">
+                      <a:solidFill>
+                        <a:schemeClr val="tx1"/>
+                      </a:solidFill>
+                      <a:prstDash val="solid"/>
+                      <a:round/>
+                      <a:headEnd type="none" w="med" len="med"/>
+                      <a:tailEnd type="none" w="med" len="med"/>
+                    </a:lnB>
+                    <a:noFill/>
+                  </a:tcPr>
+                </a:tc>
+                <a:tc>
+                  <a:txBody>
+                    <a:bodyPr/>
+                    <a:lstStyle/>
+                    <a:p>
+                      <a:pPr algn="ctr" latinLnBrk="1"/>
+                      <a:r>
+                        <a:rPr lang="en-US" altLang="ko-KR" b="0" dirty="0">
+                          <a:solidFill>
+                            <a:schemeClr val="tx1"/>
+                          </a:solidFill>
+                        </a:rPr>
+                        <a:t>[2]</a:t>
+                      </a:r>
+                      <a:endParaRPr lang="ko-KR" altLang="en-US" dirty="0">
+                        <a:solidFill>
+                          <a:schemeClr val="tx1"/>
+                        </a:solidFill>
+                      </a:endParaRPr>
+                    </a:p>
+                  </a:txBody>
+                  <a:tcPr>
+                    <a:lnL w="12700" cap="flat" cmpd="sng" algn="ctr">
+                      <a:solidFill>
+                        <a:schemeClr val="tx1"/>
+                      </a:solidFill>
+                      <a:prstDash val="solid"/>
+                      <a:round/>
+                      <a:headEnd type="none" w="med" len="med"/>
+                      <a:tailEnd type="none" w="med" len="med"/>
+                    </a:lnL>
+                    <a:lnR w="12700" cap="flat" cmpd="sng" algn="ctr">
+                      <a:solidFill>
+                        <a:schemeClr val="tx1"/>
+                      </a:solidFill>
+                      <a:prstDash val="solid"/>
+                      <a:round/>
+                      <a:headEnd type="none" w="med" len="med"/>
+                      <a:tailEnd type="none" w="med" len="med"/>
+                    </a:lnR>
+                    <a:lnT w="12700" cap="flat" cmpd="sng" algn="ctr">
+                      <a:solidFill>
+                        <a:schemeClr val="tx1"/>
+                      </a:solidFill>
+                      <a:prstDash val="solid"/>
+                      <a:round/>
+                      <a:headEnd type="none" w="med" len="med"/>
+                      <a:tailEnd type="none" w="med" len="med"/>
+                    </a:lnT>
+                    <a:lnB w="12700" cap="flat" cmpd="sng" algn="ctr">
+                      <a:solidFill>
+                        <a:schemeClr val="tx1"/>
+                      </a:solidFill>
+                      <a:prstDash val="solid"/>
+                      <a:round/>
+                      <a:headEnd type="none" w="med" len="med"/>
+                      <a:tailEnd type="none" w="med" len="med"/>
+                    </a:lnB>
+                    <a:noFill/>
+                  </a:tcPr>
+                </a:tc>
+                <a:tc>
+                  <a:txBody>
+                    <a:bodyPr/>
+                    <a:lstStyle/>
+                    <a:p>
+                      <a:pPr algn="ctr" latinLnBrk="1"/>
+                      <a:r>
+                        <a:rPr lang="en-US" altLang="ko-KR" b="0" dirty="0">
+                          <a:solidFill>
+                            <a:schemeClr val="tx1"/>
+                          </a:solidFill>
+                        </a:rPr>
+                        <a:t>[3]</a:t>
+                      </a:r>
+                      <a:endParaRPr lang="ko-KR" altLang="en-US" dirty="0">
+                        <a:solidFill>
+                          <a:schemeClr val="tx1"/>
+                        </a:solidFill>
+                      </a:endParaRPr>
+                    </a:p>
+                  </a:txBody>
+                  <a:tcPr>
+                    <a:lnL w="12700" cap="flat" cmpd="sng" algn="ctr">
+                      <a:solidFill>
+                        <a:schemeClr val="tx1"/>
+                      </a:solidFill>
+                      <a:prstDash val="solid"/>
+                      <a:round/>
+                      <a:headEnd type="none" w="med" len="med"/>
+                      <a:tailEnd type="none" w="med" len="med"/>
+                    </a:lnL>
+                    <a:lnR w="12700" cap="flat" cmpd="sng" algn="ctr">
+                      <a:solidFill>
+                        <a:schemeClr val="tx1"/>
+                      </a:solidFill>
+                      <a:prstDash val="solid"/>
+                      <a:round/>
+                      <a:headEnd type="none" w="med" len="med"/>
+                      <a:tailEnd type="none" w="med" len="med"/>
+                    </a:lnR>
+                    <a:lnT w="12700" cap="flat" cmpd="sng" algn="ctr">
+                      <a:solidFill>
+                        <a:schemeClr val="tx1"/>
+                      </a:solidFill>
+                      <a:prstDash val="solid"/>
+                      <a:round/>
+                      <a:headEnd type="none" w="med" len="med"/>
+                      <a:tailEnd type="none" w="med" len="med"/>
+                    </a:lnT>
+                    <a:lnB w="12700" cap="flat" cmpd="sng" algn="ctr">
+                      <a:solidFill>
+                        <a:schemeClr val="tx1"/>
+                      </a:solidFill>
+                      <a:prstDash val="solid"/>
+                      <a:round/>
+                      <a:headEnd type="none" w="med" len="med"/>
+                      <a:tailEnd type="none" w="med" len="med"/>
+                    </a:lnB>
+                    <a:noFill/>
+                  </a:tcPr>
+                </a:tc>
+                <a:tc>
+                  <a:txBody>
+                    <a:bodyPr/>
+                    <a:lstStyle/>
+                    <a:p>
+                      <a:pPr algn="ctr" latinLnBrk="1"/>
+                      <a:r>
+                        <a:rPr lang="en-US" altLang="ko-KR" b="0" dirty="0">
+                          <a:solidFill>
+                            <a:schemeClr val="tx1"/>
+                          </a:solidFill>
+                        </a:rPr>
+                        <a:t>[4]</a:t>
+                      </a:r>
+                      <a:endParaRPr lang="ko-KR" altLang="en-US" dirty="0">
+                        <a:solidFill>
+                          <a:schemeClr val="tx1"/>
+                        </a:solidFill>
+                      </a:endParaRPr>
+                    </a:p>
+                  </a:txBody>
+                  <a:tcPr>
+                    <a:lnL w="12700" cap="flat" cmpd="sng" algn="ctr">
+                      <a:solidFill>
+                        <a:schemeClr val="tx1"/>
+                      </a:solidFill>
+                      <a:prstDash val="solid"/>
+                      <a:round/>
+                      <a:headEnd type="none" w="med" len="med"/>
+                      <a:tailEnd type="none" w="med" len="med"/>
+                    </a:lnL>
+                    <a:lnR w="12700" cap="flat" cmpd="sng" algn="ctr">
+                      <a:solidFill>
+                        <a:schemeClr val="tx1"/>
+                      </a:solidFill>
+                      <a:prstDash val="solid"/>
+                      <a:round/>
+                      <a:headEnd type="none" w="med" len="med"/>
+                      <a:tailEnd type="none" w="med" len="med"/>
+                    </a:lnR>
+                    <a:lnT w="12700" cap="flat" cmpd="sng" algn="ctr">
+                      <a:solidFill>
+                        <a:schemeClr val="tx1"/>
+                      </a:solidFill>
+                      <a:prstDash val="solid"/>
+                      <a:round/>
+                      <a:headEnd type="none" w="med" len="med"/>
+                      <a:tailEnd type="none" w="med" len="med"/>
+                    </a:lnT>
+                    <a:lnB w="12700" cap="flat" cmpd="sng" algn="ctr">
+                      <a:solidFill>
+                        <a:schemeClr val="tx1"/>
+                      </a:solidFill>
+                      <a:prstDash val="solid"/>
+                      <a:round/>
+                      <a:headEnd type="none" w="med" len="med"/>
+                      <a:tailEnd type="none" w="med" len="med"/>
+                    </a:lnB>
+                    <a:noFill/>
+                  </a:tcPr>
+                </a:tc>
+                <a:extLst>
+                  <a:ext uri="{0D108BD9-81ED-4DB2-BD59-A6C34878D82A}">
+                    <a16:rowId xmlns:a16="http://schemas.microsoft.com/office/drawing/2014/main" val="3857244884"/>
+                  </a:ext>
+                </a:extLst>
+              </a:tr>
+              <a:tr h="295187">
+                <a:tc>
+                  <a:txBody>
+                    <a:bodyPr/>
+                    <a:lstStyle/>
+                    <a:p>
+                      <a:pPr algn="ctr" latinLnBrk="1"/>
+                      <a:r>
+                        <a:rPr lang="en-US" altLang="ko-KR" dirty="0">
+                          <a:solidFill>
+                            <a:schemeClr val="tx1"/>
+                          </a:solidFill>
+                        </a:rPr>
+                        <a:t>10</a:t>
+                      </a:r>
+                      <a:endParaRPr lang="ko-KR" altLang="en-US" dirty="0">
+                        <a:solidFill>
+                          <a:schemeClr val="tx1"/>
+                        </a:solidFill>
+                      </a:endParaRPr>
+                    </a:p>
+                  </a:txBody>
+                  <a:tcPr>
+                    <a:lnL w="12700" cap="flat" cmpd="sng" algn="ctr">
+                      <a:solidFill>
+                        <a:schemeClr val="tx1"/>
+                      </a:solidFill>
+                      <a:prstDash val="solid"/>
+                      <a:round/>
+                      <a:headEnd type="none" w="med" len="med"/>
+                      <a:tailEnd type="none" w="med" len="med"/>
+                    </a:lnL>
+                    <a:lnR w="12700" cap="flat" cmpd="sng" algn="ctr">
+                      <a:solidFill>
+                        <a:schemeClr val="tx1"/>
+                      </a:solidFill>
+                      <a:prstDash val="solid"/>
+                      <a:round/>
+                      <a:headEnd type="none" w="med" len="med"/>
+                      <a:tailEnd type="none" w="med" len="med"/>
+                    </a:lnR>
+                    <a:lnT w="12700" cap="flat" cmpd="sng" algn="ctr">
+                      <a:solidFill>
+                        <a:schemeClr val="tx1"/>
+                      </a:solidFill>
+                      <a:prstDash val="solid"/>
+                      <a:round/>
+                      <a:headEnd type="none" w="med" len="med"/>
+                      <a:tailEnd type="none" w="med" len="med"/>
+                    </a:lnT>
+                    <a:lnB w="12700" cap="flat" cmpd="sng" algn="ctr">
+                      <a:solidFill>
+                        <a:schemeClr val="tx1"/>
+                      </a:solidFill>
+                      <a:prstDash val="solid"/>
+                      <a:round/>
+                      <a:headEnd type="none" w="med" len="med"/>
+                      <a:tailEnd type="none" w="med" len="med"/>
+                    </a:lnB>
+                    <a:noFill/>
+                  </a:tcPr>
+                </a:tc>
+                <a:tc>
+                  <a:txBody>
+                    <a:bodyPr/>
+                    <a:lstStyle/>
+                    <a:p>
+                      <a:pPr algn="ctr" latinLnBrk="1"/>
+                      <a:r>
+                        <a:rPr lang="en-US" altLang="ko-KR" dirty="0">
+                          <a:solidFill>
+                            <a:schemeClr val="tx1"/>
+                          </a:solidFill>
+                        </a:rPr>
+                        <a:t>20</a:t>
+                      </a:r>
+                      <a:endParaRPr lang="ko-KR" altLang="en-US" dirty="0">
+                        <a:solidFill>
+                          <a:schemeClr val="tx1"/>
+                        </a:solidFill>
+                      </a:endParaRPr>
+                    </a:p>
+                  </a:txBody>
+                  <a:tcPr>
+                    <a:lnL w="12700" cap="flat" cmpd="sng" algn="ctr">
+                      <a:solidFill>
+                        <a:schemeClr val="tx1"/>
+                      </a:solidFill>
+                      <a:prstDash val="solid"/>
+                      <a:round/>
+                      <a:headEnd type="none" w="med" len="med"/>
+                      <a:tailEnd type="none" w="med" len="med"/>
+                    </a:lnL>
+                    <a:lnR w="12700" cap="flat" cmpd="sng" algn="ctr">
+                      <a:solidFill>
+                        <a:schemeClr val="tx1"/>
+                      </a:solidFill>
+                      <a:prstDash val="solid"/>
+                      <a:round/>
+                      <a:headEnd type="none" w="med" len="med"/>
+                      <a:tailEnd type="none" w="med" len="med"/>
+                    </a:lnR>
+                    <a:lnT w="12700" cap="flat" cmpd="sng" algn="ctr">
+                      <a:solidFill>
+                        <a:schemeClr val="tx1"/>
+                      </a:solidFill>
+                      <a:prstDash val="solid"/>
+                      <a:round/>
+                      <a:headEnd type="none" w="med" len="med"/>
+                      <a:tailEnd type="none" w="med" len="med"/>
+                    </a:lnT>
+                    <a:lnB w="12700" cap="flat" cmpd="sng" algn="ctr">
+                      <a:solidFill>
+                        <a:schemeClr val="tx1"/>
+                      </a:solidFill>
+                      <a:prstDash val="solid"/>
+                      <a:round/>
+                      <a:headEnd type="none" w="med" len="med"/>
+                      <a:tailEnd type="none" w="med" len="med"/>
+                    </a:lnB>
+                    <a:noFill/>
+                  </a:tcPr>
+                </a:tc>
+                <a:tc>
+                  <a:txBody>
+                    <a:bodyPr/>
+                    <a:lstStyle/>
+                    <a:p>
+                      <a:pPr algn="ctr" latinLnBrk="1"/>
+                      <a:r>
+                        <a:rPr lang="en-US" altLang="ko-KR" dirty="0">
+                          <a:solidFill>
+                            <a:schemeClr val="tx1"/>
+                          </a:solidFill>
+                        </a:rPr>
+                        <a:t>30</a:t>
+                      </a:r>
+                      <a:endParaRPr lang="ko-KR" altLang="en-US" dirty="0">
+                        <a:solidFill>
+                          <a:schemeClr val="tx1"/>
+                        </a:solidFill>
+                      </a:endParaRPr>
+                    </a:p>
+                  </a:txBody>
+                  <a:tcPr>
+                    <a:lnL w="12700" cap="flat" cmpd="sng" algn="ctr">
+                      <a:solidFill>
+                        <a:schemeClr val="tx1"/>
+                      </a:solidFill>
+                      <a:prstDash val="solid"/>
+                      <a:round/>
+                      <a:headEnd type="none" w="med" len="med"/>
+                      <a:tailEnd type="none" w="med" len="med"/>
+                    </a:lnL>
+                    <a:lnR w="12700" cap="flat" cmpd="sng" algn="ctr">
+                      <a:solidFill>
+                        <a:schemeClr val="tx1"/>
+                      </a:solidFill>
+                      <a:prstDash val="solid"/>
+                      <a:round/>
+                      <a:headEnd type="none" w="med" len="med"/>
+                      <a:tailEnd type="none" w="med" len="med"/>
+                    </a:lnR>
+                    <a:lnT w="12700" cap="flat" cmpd="sng" algn="ctr">
+                      <a:solidFill>
+                        <a:schemeClr val="tx1"/>
+                      </a:solidFill>
+                      <a:prstDash val="solid"/>
+                      <a:round/>
+                      <a:headEnd type="none" w="med" len="med"/>
+                      <a:tailEnd type="none" w="med" len="med"/>
+                    </a:lnT>
+                    <a:lnB w="12700" cap="flat" cmpd="sng" algn="ctr">
+                      <a:solidFill>
+                        <a:schemeClr val="tx1"/>
+                      </a:solidFill>
+                      <a:prstDash val="solid"/>
+                      <a:round/>
+                      <a:headEnd type="none" w="med" len="med"/>
+                      <a:tailEnd type="none" w="med" len="med"/>
+                    </a:lnB>
+                    <a:noFill/>
+                  </a:tcPr>
+                </a:tc>
+                <a:tc>
+                  <a:txBody>
+                    <a:bodyPr/>
+                    <a:lstStyle/>
+                    <a:p>
+                      <a:pPr algn="ctr" latinLnBrk="1"/>
+                      <a:r>
+                        <a:rPr lang="en-US" altLang="ko-KR" dirty="0">
+                          <a:solidFill>
+                            <a:schemeClr val="tx1"/>
+                          </a:solidFill>
+                        </a:rPr>
+                        <a:t>40</a:t>
+                      </a:r>
+                      <a:endParaRPr lang="ko-KR" altLang="en-US" dirty="0">
+                        <a:solidFill>
+                          <a:schemeClr val="tx1"/>
+                        </a:solidFill>
+                      </a:endParaRPr>
+                    </a:p>
+                  </a:txBody>
+                  <a:tcPr>
+                    <a:lnL w="12700" cap="flat" cmpd="sng" algn="ctr">
+                      <a:solidFill>
+                        <a:schemeClr val="tx1"/>
+                      </a:solidFill>
+                      <a:prstDash val="solid"/>
+                      <a:round/>
+                      <a:headEnd type="none" w="med" len="med"/>
+                      <a:tailEnd type="none" w="med" len="med"/>
+                    </a:lnL>
+                    <a:lnR w="12700" cap="flat" cmpd="sng" algn="ctr">
+                      <a:solidFill>
+                        <a:schemeClr val="tx1"/>
+                      </a:solidFill>
+                      <a:prstDash val="solid"/>
+                      <a:round/>
+                      <a:headEnd type="none" w="med" len="med"/>
+                      <a:tailEnd type="none" w="med" len="med"/>
+                    </a:lnR>
+                    <a:lnT w="12700" cap="flat" cmpd="sng" algn="ctr">
+                      <a:solidFill>
+                        <a:schemeClr val="tx1"/>
+                      </a:solidFill>
+                      <a:prstDash val="solid"/>
+                      <a:round/>
+                      <a:headEnd type="none" w="med" len="med"/>
+                      <a:tailEnd type="none" w="med" len="med"/>
+                    </a:lnT>
+                    <a:lnB w="12700" cap="flat" cmpd="sng" algn="ctr">
+                      <a:solidFill>
+                        <a:schemeClr val="tx1"/>
+                      </a:solidFill>
+                      <a:prstDash val="solid"/>
+                      <a:round/>
+                      <a:headEnd type="none" w="med" len="med"/>
+                      <a:tailEnd type="none" w="med" len="med"/>
+                    </a:lnB>
+                    <a:noFill/>
+                  </a:tcPr>
+                </a:tc>
+                <a:tc>
+                  <a:txBody>
+                    <a:bodyPr/>
+                    <a:lstStyle/>
+                    <a:p>
+                      <a:pPr algn="ctr" latinLnBrk="1"/>
+                      <a:r>
+                        <a:rPr lang="en-US" altLang="ko-KR" dirty="0">
+                          <a:solidFill>
+                            <a:schemeClr val="tx1"/>
+                          </a:solidFill>
+                        </a:rPr>
+                        <a:t>50</a:t>
+                      </a:r>
+                      <a:endParaRPr lang="ko-KR" altLang="en-US" dirty="0">
+                        <a:solidFill>
+                          <a:schemeClr val="tx1"/>
+                        </a:solidFill>
+                      </a:endParaRPr>
+                    </a:p>
+                  </a:txBody>
+                  <a:tcPr>
+                    <a:lnL w="12700" cap="flat" cmpd="sng" algn="ctr">
+                      <a:solidFill>
+                        <a:schemeClr val="tx1"/>
+                      </a:solidFill>
+                      <a:prstDash val="solid"/>
+                      <a:round/>
+                      <a:headEnd type="none" w="med" len="med"/>
+                      <a:tailEnd type="none" w="med" len="med"/>
+                    </a:lnL>
+                    <a:lnR w="12700" cap="flat" cmpd="sng" algn="ctr">
+                      <a:solidFill>
+                        <a:schemeClr val="tx1"/>
+                      </a:solidFill>
+                      <a:prstDash val="solid"/>
+                      <a:round/>
+                      <a:headEnd type="none" w="med" len="med"/>
+                      <a:tailEnd type="none" w="med" len="med"/>
+                    </a:lnR>
+                    <a:lnT w="12700" cap="flat" cmpd="sng" algn="ctr">
+                      <a:solidFill>
+                        <a:schemeClr val="tx1"/>
+                      </a:solidFill>
+                      <a:prstDash val="solid"/>
+                      <a:round/>
+                      <a:headEnd type="none" w="med" len="med"/>
+                      <a:tailEnd type="none" w="med" len="med"/>
+                    </a:lnT>
+                    <a:lnB w="12700" cap="flat" cmpd="sng" algn="ctr">
+                      <a:solidFill>
+                        <a:schemeClr val="tx1"/>
+                      </a:solidFill>
+                      <a:prstDash val="solid"/>
+                      <a:round/>
+                      <a:headEnd type="none" w="med" len="med"/>
+                      <a:tailEnd type="none" w="med" len="med"/>
+                    </a:lnB>
+                    <a:noFill/>
+                  </a:tcPr>
+                </a:tc>
+                <a:extLst>
+                  <a:ext uri="{0D108BD9-81ED-4DB2-BD59-A6C34878D82A}">
+                    <a16:rowId xmlns:a16="http://schemas.microsoft.com/office/drawing/2014/main" val="3919909872"/>
+                  </a:ext>
+                </a:extLst>
+              </a:tr>
+            </a:tbl>
+          </a:graphicData>
+        </a:graphic>
+      </p:graphicFrame>
+      <p:grpSp>
+        <p:nvGrpSpPr>
+          <p:cNvPr id="3" name="그룹 2">
+            <a:extLst>
+              <a:ext uri="{FF2B5EF4-FFF2-40B4-BE49-F238E27FC236}">
+                <a16:creationId xmlns:a16="http://schemas.microsoft.com/office/drawing/2014/main" id="{7B679691-5DF4-0CD5-F3F8-E6B96974F5FF}"/>
+              </a:ext>
+            </a:extLst>
+          </p:cNvPr>
+          <p:cNvGrpSpPr/>
+          <p:nvPr/>
+        </p:nvGrpSpPr>
+        <p:grpSpPr>
+          <a:xfrm>
+            <a:off x="5682343" y="3702025"/>
+            <a:ext cx="827314" cy="715199"/>
+            <a:chOff x="8596086" y="2744558"/>
+            <a:chExt cx="827314" cy="715199"/>
+          </a:xfrm>
+        </p:grpSpPr>
+        <p:sp>
+          <p:nvSpPr>
+            <p:cNvPr id="4" name="사각형: 둥근 모서리 3">
+              <a:extLst>
+                <a:ext uri="{FF2B5EF4-FFF2-40B4-BE49-F238E27FC236}">
+                  <a16:creationId xmlns:a16="http://schemas.microsoft.com/office/drawing/2014/main" id="{461BFB0B-577C-B95C-6BBE-B6B7D1AA47CB}"/>
+                </a:ext>
+              </a:extLst>
+            </p:cNvPr>
+            <p:cNvSpPr>
+              <a:spLocks/>
+            </p:cNvSpPr>
+            <p:nvPr/>
+          </p:nvSpPr>
+          <p:spPr>
+            <a:xfrm>
+              <a:off x="8596086" y="3153658"/>
+              <a:ext cx="827314" cy="306099"/>
+            </a:xfrm>
+            <a:prstGeom prst="roundRect">
+              <a:avLst/>
+            </a:prstGeom>
+            <a:noFill/>
+          </p:spPr>
+          <p:style>
+            <a:lnRef idx="2">
+              <a:schemeClr val="accent1">
+                <a:shade val="15000"/>
+              </a:schemeClr>
+            </a:lnRef>
+            <a:fillRef idx="1">
+              <a:schemeClr val="accent1"/>
+            </a:fillRef>
+            <a:effectRef idx="0">
+              <a:schemeClr val="accent1"/>
+            </a:effectRef>
+            <a:fontRef idx="minor">
+              <a:schemeClr val="lt1"/>
+            </a:fontRef>
+          </p:style>
+          <p:txBody>
+            <a:bodyPr rtlCol="0" anchor="ctr"/>
+            <a:lstStyle/>
+            <a:p>
+              <a:pPr algn="ctr"/>
+              <a:r>
+                <a:rPr lang="en-US" altLang="ko-KR" b="1" dirty="0">
+                  <a:solidFill>
+                    <a:srgbClr val="FF0000"/>
+                  </a:solidFill>
+                </a:rPr>
+                <a:t>Rear</a:t>
+              </a:r>
+              <a:endParaRPr lang="ko-KR" altLang="en-US" b="1" dirty="0">
+                <a:solidFill>
+                  <a:srgbClr val="FF0000"/>
+                </a:solidFill>
+              </a:endParaRPr>
+            </a:p>
+          </p:txBody>
+        </p:sp>
+        <p:sp>
+          <p:nvSpPr>
+            <p:cNvPr id="5" name="화살표: 위쪽 4">
+              <a:extLst>
+                <a:ext uri="{FF2B5EF4-FFF2-40B4-BE49-F238E27FC236}">
+                  <a16:creationId xmlns:a16="http://schemas.microsoft.com/office/drawing/2014/main" id="{2303CB6F-3D46-44BA-CF0A-982395D282A5}"/>
+                </a:ext>
+              </a:extLst>
+            </p:cNvPr>
+            <p:cNvSpPr>
+              <a:spLocks/>
+            </p:cNvSpPr>
+            <p:nvPr/>
+          </p:nvSpPr>
+          <p:spPr>
+            <a:xfrm>
+              <a:off x="8908143" y="2744558"/>
+              <a:ext cx="203200" cy="409100"/>
+            </a:xfrm>
+            <a:prstGeom prst="upArrow">
+              <a:avLst/>
+            </a:prstGeom>
+            <a:solidFill>
+              <a:srgbClr val="FF0000"/>
+            </a:solidFill>
+          </p:spPr>
+          <p:style>
+            <a:lnRef idx="2">
+              <a:schemeClr val="accent1">
+                <a:shade val="15000"/>
+              </a:schemeClr>
+            </a:lnRef>
+            <a:fillRef idx="1">
+              <a:schemeClr val="accent1"/>
+            </a:fillRef>
+            <a:effectRef idx="0">
+              <a:schemeClr val="accent1"/>
+            </a:effectRef>
+            <a:fontRef idx="minor">
+              <a:schemeClr val="lt1"/>
+            </a:fontRef>
+          </p:style>
+          <p:txBody>
+            <a:bodyPr rtlCol="0" anchor="ctr"/>
+            <a:lstStyle/>
+            <a:p>
+              <a:pPr algn="ctr"/>
+              <a:endParaRPr lang="ko-KR" altLang="en-US"/>
+            </a:p>
+          </p:txBody>
+        </p:sp>
+      </p:grpSp>
+      <p:grpSp>
+        <p:nvGrpSpPr>
+          <p:cNvPr id="12" name="그룹 11">
+            <a:extLst>
+              <a:ext uri="{FF2B5EF4-FFF2-40B4-BE49-F238E27FC236}">
+                <a16:creationId xmlns:a16="http://schemas.microsoft.com/office/drawing/2014/main" id="{38781BC7-27C7-0565-9F0F-68FCD6964A88}"/>
+              </a:ext>
+            </a:extLst>
+          </p:cNvPr>
+          <p:cNvGrpSpPr/>
+          <p:nvPr/>
+        </p:nvGrpSpPr>
+        <p:grpSpPr>
+          <a:xfrm>
+            <a:off x="5643150" y="2174680"/>
+            <a:ext cx="827314" cy="625293"/>
+            <a:chOff x="7910524" y="234700"/>
+            <a:chExt cx="827314" cy="625293"/>
+          </a:xfrm>
+        </p:grpSpPr>
+        <p:sp>
+          <p:nvSpPr>
+            <p:cNvPr id="17" name="사각형: 둥근 모서리 16">
+              <a:extLst>
+                <a:ext uri="{FF2B5EF4-FFF2-40B4-BE49-F238E27FC236}">
+                  <a16:creationId xmlns:a16="http://schemas.microsoft.com/office/drawing/2014/main" id="{4B2EA621-312A-A0CC-2DC9-2C6BD22B2E01}"/>
+                </a:ext>
+              </a:extLst>
+            </p:cNvPr>
+            <p:cNvSpPr/>
+            <p:nvPr/>
+          </p:nvSpPr>
+          <p:spPr>
+            <a:xfrm>
+              <a:off x="7910524" y="234700"/>
+              <a:ext cx="827314" cy="306099"/>
+            </a:xfrm>
+            <a:prstGeom prst="roundRect">
+              <a:avLst/>
+            </a:prstGeom>
+            <a:noFill/>
+          </p:spPr>
+          <p:style>
+            <a:lnRef idx="2">
+              <a:schemeClr val="accent1">
+                <a:shade val="15000"/>
+              </a:schemeClr>
+            </a:lnRef>
+            <a:fillRef idx="1">
+              <a:schemeClr val="accent1"/>
+            </a:fillRef>
+            <a:effectRef idx="0">
+              <a:schemeClr val="accent1"/>
+            </a:effectRef>
+            <a:fontRef idx="minor">
+              <a:schemeClr val="lt1"/>
+            </a:fontRef>
+          </p:style>
+          <p:txBody>
+            <a:bodyPr rtlCol="0" anchor="ctr"/>
+            <a:lstStyle/>
+            <a:p>
+              <a:pPr algn="ctr"/>
+              <a:r>
+                <a:rPr lang="en-US" altLang="ko-KR" b="1" dirty="0">
+                  <a:solidFill>
+                    <a:srgbClr val="0000FF"/>
+                  </a:solidFill>
+                </a:rPr>
+                <a:t>Front</a:t>
+              </a:r>
+              <a:endParaRPr lang="ko-KR" altLang="en-US" b="1" dirty="0">
+                <a:solidFill>
+                  <a:srgbClr val="0000FF"/>
+                </a:solidFill>
+              </a:endParaRPr>
+            </a:p>
+          </p:txBody>
+        </p:sp>
+        <p:sp>
+          <p:nvSpPr>
+            <p:cNvPr id="18" name="화살표: 아래쪽 17">
+              <a:extLst>
+                <a:ext uri="{FF2B5EF4-FFF2-40B4-BE49-F238E27FC236}">
+                  <a16:creationId xmlns:a16="http://schemas.microsoft.com/office/drawing/2014/main" id="{FAC00F3A-6F7B-65A0-A014-87296D037420}"/>
+                </a:ext>
+              </a:extLst>
+            </p:cNvPr>
+            <p:cNvSpPr/>
+            <p:nvPr/>
+          </p:nvSpPr>
+          <p:spPr>
+            <a:xfrm>
+              <a:off x="8240197" y="553894"/>
+              <a:ext cx="174171" cy="306099"/>
+            </a:xfrm>
+            <a:prstGeom prst="downArrow">
+              <a:avLst/>
+            </a:prstGeom>
+          </p:spPr>
+          <p:style>
+            <a:lnRef idx="2">
+              <a:schemeClr val="accent1">
+                <a:shade val="15000"/>
+              </a:schemeClr>
+            </a:lnRef>
+            <a:fillRef idx="1">
+              <a:schemeClr val="accent1"/>
+            </a:fillRef>
+            <a:effectRef idx="0">
+              <a:schemeClr val="accent1"/>
+            </a:effectRef>
+            <a:fontRef idx="minor">
+              <a:schemeClr val="lt1"/>
+            </a:fontRef>
+          </p:style>
+          <p:txBody>
+            <a:bodyPr rtlCol="0" anchor="ctr"/>
+            <a:lstStyle/>
+            <a:p>
+              <a:pPr algn="ctr"/>
+              <a:endParaRPr lang="ko-KR" altLang="en-US"/>
+            </a:p>
+          </p:txBody>
+        </p:sp>
+      </p:grpSp>
+      <p:sp>
+        <p:nvSpPr>
+          <p:cNvPr id="19" name="화살표: 오른쪽 18">
+            <a:extLst>
+              <a:ext uri="{FF2B5EF4-FFF2-40B4-BE49-F238E27FC236}">
+                <a16:creationId xmlns:a16="http://schemas.microsoft.com/office/drawing/2014/main" id="{4A869A24-FF1E-D8EF-BB5F-788CA6B6C4B8}"/>
+              </a:ext>
+            </a:extLst>
+          </p:cNvPr>
+          <p:cNvSpPr/>
+          <p:nvPr/>
+        </p:nvSpPr>
+        <p:spPr>
+          <a:xfrm>
+            <a:off x="167209" y="2480779"/>
+            <a:ext cx="501253" cy="138891"/>
+          </a:xfrm>
+          <a:prstGeom prst="rightArrow">
+            <a:avLst/>
+          </a:prstGeom>
+          <a:solidFill>
+            <a:schemeClr val="tx1"/>
+          </a:solidFill>
+        </p:spPr>
+        <p:style>
+          <a:lnRef idx="2">
+            <a:schemeClr val="accent1">
+              <a:shade val="15000"/>
+            </a:schemeClr>
+          </a:lnRef>
+          <a:fillRef idx="1">
+            <a:schemeClr val="accent1"/>
+          </a:fillRef>
+          <a:effectRef idx="0">
+            <a:schemeClr val="accent1"/>
+          </a:effectRef>
+          <a:fontRef idx="minor">
+            <a:schemeClr val="lt1"/>
+          </a:fontRef>
+        </p:style>
+        <p:txBody>
+          <a:bodyPr rtlCol="0" anchor="ctr"/>
+          <a:lstStyle/>
+          <a:p>
+            <a:pPr algn="ctr"/>
+            <a:endParaRPr lang="ko-KR" altLang="en-US"/>
+          </a:p>
+        </p:txBody>
+      </p:sp>
+      <p:sp>
+        <p:nvSpPr>
+          <p:cNvPr id="20" name="화살표: 오른쪽 19">
+            <a:extLst>
+              <a:ext uri="{FF2B5EF4-FFF2-40B4-BE49-F238E27FC236}">
+                <a16:creationId xmlns:a16="http://schemas.microsoft.com/office/drawing/2014/main" id="{5D710AE4-A2A2-745E-E440-874062F8F65A}"/>
+              </a:ext>
+            </a:extLst>
+          </p:cNvPr>
+          <p:cNvSpPr/>
+          <p:nvPr/>
+        </p:nvSpPr>
+        <p:spPr>
+          <a:xfrm>
+            <a:off x="162943" y="2858888"/>
+            <a:ext cx="501253" cy="138891"/>
+          </a:xfrm>
+          <a:prstGeom prst="rightArrow">
+            <a:avLst/>
+          </a:prstGeom>
+          <a:solidFill>
+            <a:schemeClr val="tx1"/>
+          </a:solidFill>
+        </p:spPr>
+        <p:style>
+          <a:lnRef idx="2">
+            <a:schemeClr val="accent1">
+              <a:shade val="15000"/>
+            </a:schemeClr>
+          </a:lnRef>
+          <a:fillRef idx="1">
+            <a:schemeClr val="accent1"/>
+          </a:fillRef>
+          <a:effectRef idx="0">
+            <a:schemeClr val="accent1"/>
+          </a:effectRef>
+          <a:fontRef idx="minor">
+            <a:schemeClr val="lt1"/>
+          </a:fontRef>
+        </p:style>
+        <p:txBody>
+          <a:bodyPr rtlCol="0" anchor="ctr"/>
+          <a:lstStyle/>
+          <a:p>
+            <a:pPr algn="ctr"/>
+            <a:endParaRPr lang="ko-KR" altLang="en-US"/>
+          </a:p>
+        </p:txBody>
+      </p:sp>
+      <p:sp>
+        <p:nvSpPr>
+          <p:cNvPr id="21" name="화살표: 오른쪽 20">
+            <a:extLst>
+              <a:ext uri="{FF2B5EF4-FFF2-40B4-BE49-F238E27FC236}">
+                <a16:creationId xmlns:a16="http://schemas.microsoft.com/office/drawing/2014/main" id="{E7A896AE-C3E4-F9C1-F89C-A04E6715EB47}"/>
+              </a:ext>
+            </a:extLst>
+          </p:cNvPr>
+          <p:cNvSpPr/>
+          <p:nvPr/>
+        </p:nvSpPr>
+        <p:spPr>
+          <a:xfrm>
+            <a:off x="162943" y="3726980"/>
+            <a:ext cx="501253" cy="138891"/>
+          </a:xfrm>
+          <a:prstGeom prst="rightArrow">
+            <a:avLst/>
+          </a:prstGeom>
+          <a:solidFill>
+            <a:schemeClr val="tx1"/>
+          </a:solidFill>
+        </p:spPr>
+        <p:style>
+          <a:lnRef idx="2">
+            <a:schemeClr val="accent1">
+              <a:shade val="15000"/>
+            </a:schemeClr>
+          </a:lnRef>
+          <a:fillRef idx="1">
+            <a:schemeClr val="accent1"/>
+          </a:fillRef>
+          <a:effectRef idx="0">
+            <a:schemeClr val="accent1"/>
+          </a:effectRef>
+          <a:fontRef idx="minor">
+            <a:schemeClr val="lt1"/>
+          </a:fontRef>
+        </p:style>
+        <p:txBody>
+          <a:bodyPr rtlCol="0" anchor="ctr"/>
+          <a:lstStyle/>
+          <a:p>
+            <a:pPr algn="ctr"/>
+            <a:endParaRPr lang="ko-KR" altLang="en-US"/>
           </a:p>
         </p:txBody>
       </p:sp>
